--- a/Lead_presentation.pptx
+++ b/Lead_presentation.pptx
@@ -6,6 +6,11 @@
   </p:sldMasterIdLst>
   <p:sldIdLst>
     <p:sldId id="256" r:id="rId2"/>
+    <p:sldId id="257" r:id="rId3"/>
+    <p:sldId id="258" r:id="rId4"/>
+    <p:sldId id="259" r:id="rId5"/>
+    <p:sldId id="260" r:id="rId6"/>
+    <p:sldId id="261" r:id="rId7"/>
   </p:sldIdLst>
   <p:sldSz cx="12192000" cy="6858000"/>
   <p:notesSz cx="6858000" cy="9144000"/>
@@ -110,7 +115,7 @@
 <file path=ppt/revisionInfo.xml><?xml version="1.0" encoding="utf-8"?>
 <p1510:revInfo xmlns:a="http://schemas.openxmlformats.org/drawingml/2006/main" xmlns:r="http://schemas.openxmlformats.org/officeDocument/2006/relationships" xmlns:p1510="http://schemas.microsoft.com/office/powerpoint/2015/10/main">
   <p1510:revLst>
-    <p1510:client id="{0CDD0EF2-4AA4-395D-AF63-B8DE02733012}" v="10" dt="2026-05-05T09:23:09.631"/>
+    <p1510:client id="{D168FD8E-EF51-4F98-AC06-D2B3C2EC2B62}" v="1" dt="2026-05-07T09:22:05.532"/>
   </p1510:revLst>
 </p1510:revInfo>
 </file>
@@ -141,6 +146,50 @@
       </pc:sldChg>
     </pc:docChg>
   </pc:docChgLst>
+  <pc:docChgLst>
+    <pc:chgData name="Matthew Stibbons" userId="ee5ab90a-f6ef-4568-8d06-d738e61cdbd9" providerId="ADAL" clId="{256339C9-532D-4AF2-9813-51A8F91FCD55}"/>
+    <pc:docChg chg="addSld modSld">
+      <pc:chgData name="Matthew Stibbons" userId="ee5ab90a-f6ef-4568-8d06-d738e61cdbd9" providerId="ADAL" clId="{256339C9-532D-4AF2-9813-51A8F91FCD55}" dt="2026-05-07T09:22:05.513" v="0"/>
+      <pc:docMkLst>
+        <pc:docMk/>
+      </pc:docMkLst>
+      <pc:sldChg chg="add">
+        <pc:chgData name="Matthew Stibbons" userId="ee5ab90a-f6ef-4568-8d06-d738e61cdbd9" providerId="ADAL" clId="{256339C9-532D-4AF2-9813-51A8F91FCD55}" dt="2026-05-07T09:22:05.513" v="0"/>
+        <pc:sldMkLst>
+          <pc:docMk/>
+          <pc:sldMk cId="0" sldId="257"/>
+        </pc:sldMkLst>
+      </pc:sldChg>
+      <pc:sldChg chg="add">
+        <pc:chgData name="Matthew Stibbons" userId="ee5ab90a-f6ef-4568-8d06-d738e61cdbd9" providerId="ADAL" clId="{256339C9-532D-4AF2-9813-51A8F91FCD55}" dt="2026-05-07T09:22:05.513" v="0"/>
+        <pc:sldMkLst>
+          <pc:docMk/>
+          <pc:sldMk cId="0" sldId="258"/>
+        </pc:sldMkLst>
+      </pc:sldChg>
+      <pc:sldChg chg="add">
+        <pc:chgData name="Matthew Stibbons" userId="ee5ab90a-f6ef-4568-8d06-d738e61cdbd9" providerId="ADAL" clId="{256339C9-532D-4AF2-9813-51A8F91FCD55}" dt="2026-05-07T09:22:05.513" v="0"/>
+        <pc:sldMkLst>
+          <pc:docMk/>
+          <pc:sldMk cId="0" sldId="259"/>
+        </pc:sldMkLst>
+      </pc:sldChg>
+      <pc:sldChg chg="add">
+        <pc:chgData name="Matthew Stibbons" userId="ee5ab90a-f6ef-4568-8d06-d738e61cdbd9" providerId="ADAL" clId="{256339C9-532D-4AF2-9813-51A8F91FCD55}" dt="2026-05-07T09:22:05.513" v="0"/>
+        <pc:sldMkLst>
+          <pc:docMk/>
+          <pc:sldMk cId="0" sldId="260"/>
+        </pc:sldMkLst>
+      </pc:sldChg>
+      <pc:sldChg chg="add">
+        <pc:chgData name="Matthew Stibbons" userId="ee5ab90a-f6ef-4568-8d06-d738e61cdbd9" providerId="ADAL" clId="{256339C9-532D-4AF2-9813-51A8F91FCD55}" dt="2026-05-07T09:22:05.513" v="0"/>
+        <pc:sldMkLst>
+          <pc:docMk/>
+          <pc:sldMk cId="0" sldId="261"/>
+        </pc:sldMkLst>
+      </pc:sldChg>
+    </pc:docChg>
+  </pc:docChgLst>
 </pc:chgInfo>
 </file>
 
@@ -198,6 +247,13 @@
             <a:schemeClr val="lt1"/>
           </a:fontRef>
         </p:style>
+        <p:txBody>
+          <a:bodyPr/>
+          <a:lstStyle/>
+          <a:p>
+            <a:endParaRPr lang="en-GB"/>
+          </a:p>
+        </p:txBody>
       </p:sp>
       <p:sp>
         <p:nvSpPr>
@@ -236,6 +292,13 @@
             <a:schemeClr val="lt1"/>
           </a:fontRef>
         </p:style>
+        <p:txBody>
+          <a:bodyPr/>
+          <a:lstStyle/>
+          <a:p>
+            <a:endParaRPr lang="en-GB"/>
+          </a:p>
+        </p:txBody>
       </p:sp>
       <p:sp>
         <p:nvSpPr>
@@ -369,7 +432,7 @@
             <a:fld id="{73C3BD54-29B9-3D42-B178-776ED395AA85}" type="datetimeFigureOut">
               <a:rPr lang="en-US" smtClean="0"/>
               <a:pPr/>
-              <a:t>5/5/2026</a:t>
+              <a:t>5/7/2026</a:t>
             </a:fld>
             <a:endParaRPr lang="en-US" sz="1400"/>
           </a:p>
@@ -575,7 +638,7 @@
           <a:p>
             <a:fld id="{73C3BD54-29B9-3D42-B178-776ED395AA85}" type="datetimeFigureOut">
               <a:rPr lang="en-US" smtClean="0"/>
-              <a:t>5/5/2026</a:t>
+              <a:t>5/7/2026</a:t>
             </a:fld>
             <a:endParaRPr lang="en-US"/>
           </a:p>
@@ -829,7 +892,7 @@
           <a:p>
             <a:fld id="{73C3BD54-29B9-3D42-B178-776ED395AA85}" type="datetimeFigureOut">
               <a:rPr lang="en-US" smtClean="0"/>
-              <a:t>5/5/2026</a:t>
+              <a:t>5/7/2026</a:t>
             </a:fld>
             <a:endParaRPr lang="en-US"/>
           </a:p>
@@ -997,7 +1060,7 @@
           <a:p>
             <a:fld id="{73C3BD54-29B9-3D42-B178-776ED395AA85}" type="datetimeFigureOut">
               <a:rPr lang="en-US" smtClean="0"/>
-              <a:t>5/5/2026</a:t>
+              <a:t>5/7/2026</a:t>
             </a:fld>
             <a:endParaRPr lang="en-US"/>
           </a:p>
@@ -1339,7 +1402,7 @@
           <a:p>
             <a:fld id="{73C3BD54-29B9-3D42-B178-776ED395AA85}" type="datetimeFigureOut">
               <a:rPr lang="en-US" smtClean="0"/>
-              <a:t>5/5/2026</a:t>
+              <a:t>5/7/2026</a:t>
             </a:fld>
             <a:endParaRPr lang="en-US"/>
           </a:p>
@@ -1611,7 +1674,7 @@
           <a:p>
             <a:fld id="{73C3BD54-29B9-3D42-B178-776ED395AA85}" type="datetimeFigureOut">
               <a:rPr lang="en-US" smtClean="0"/>
-              <a:t>5/5/2026</a:t>
+              <a:t>5/7/2026</a:t>
             </a:fld>
             <a:endParaRPr lang="en-US"/>
           </a:p>
@@ -1988,7 +2051,7 @@
             <a:fld id="{73C3BD54-29B9-3D42-B178-776ED395AA85}" type="datetimeFigureOut">
               <a:rPr lang="en-US" smtClean="0"/>
               <a:pPr/>
-              <a:t>5/5/2026</a:t>
+              <a:t>5/7/2026</a:t>
             </a:fld>
             <a:endParaRPr lang="en-US"/>
           </a:p>
@@ -2106,7 +2169,7 @@
           <a:p>
             <a:fld id="{73C3BD54-29B9-3D42-B178-776ED395AA85}" type="datetimeFigureOut">
               <a:rPr lang="en-US" smtClean="0"/>
-              <a:t>5/5/2026</a:t>
+              <a:t>5/7/2026</a:t>
             </a:fld>
             <a:endParaRPr lang="en-US"/>
           </a:p>
@@ -2277,7 +2340,7 @@
           <a:p>
             <a:fld id="{73C3BD54-29B9-3D42-B178-776ED395AA85}" type="datetimeFigureOut">
               <a:rPr lang="en-US" smtClean="0"/>
-              <a:t>5/5/2026</a:t>
+              <a:t>5/7/2026</a:t>
             </a:fld>
             <a:endParaRPr lang="en-US"/>
           </a:p>
@@ -2629,7 +2692,7 @@
           <a:p>
             <a:fld id="{73C3BD54-29B9-3D42-B178-776ED395AA85}" type="datetimeFigureOut">
               <a:rPr lang="en-US" smtClean="0"/>
-              <a:t>5/5/2026</a:t>
+              <a:t>5/7/2026</a:t>
             </a:fld>
             <a:endParaRPr lang="en-US"/>
           </a:p>
@@ -3004,7 +3067,7 @@
           <a:p>
             <a:fld id="{73C3BD54-29B9-3D42-B178-776ED395AA85}" type="datetimeFigureOut">
               <a:rPr lang="en-US" smtClean="0"/>
-              <a:t>5/5/2026</a:t>
+              <a:t>5/7/2026</a:t>
             </a:fld>
             <a:endParaRPr lang="en-US"/>
           </a:p>
@@ -3124,6 +3187,13 @@
             <a:schemeClr val="lt1"/>
           </a:fontRef>
         </p:style>
+        <p:txBody>
+          <a:bodyPr/>
+          <a:lstStyle/>
+          <a:p>
+            <a:endParaRPr lang="en-GB"/>
+          </a:p>
+        </p:txBody>
       </p:sp>
       <p:sp>
         <p:nvSpPr>
@@ -3162,6 +3232,13 @@
             <a:schemeClr val="lt1"/>
           </a:fontRef>
         </p:style>
+        <p:txBody>
+          <a:bodyPr/>
+          <a:lstStyle/>
+          <a:p>
+            <a:endParaRPr lang="en-GB"/>
+          </a:p>
+        </p:txBody>
       </p:sp>
       <p:sp>
         <p:nvSpPr>
@@ -3290,7 +3367,7 @@
             <a:fld id="{73C3BD54-29B9-3D42-B178-776ED395AA85}" type="datetimeFigureOut">
               <a:rPr lang="en-US" smtClean="0"/>
               <a:pPr/>
-              <a:t>5/5/2026</a:t>
+              <a:t>5/7/2026</a:t>
             </a:fld>
             <a:endParaRPr lang="en-US"/>
           </a:p>
@@ -3911,6 +3988,3149 @@
 </p:sld>
 </file>
 
+<file path=ppt/slides/slide2.xml><?xml version="1.0" encoding="utf-8"?>
+<p:sld xmlns:a="http://schemas.openxmlformats.org/drawingml/2006/main" xmlns:r="http://schemas.openxmlformats.org/officeDocument/2006/relationships" xmlns:p="http://schemas.openxmlformats.org/presentationml/2006/main">
+  <p:cSld>
+    <p:spTree>
+      <p:nvGrpSpPr>
+        <p:cNvPr id="1" name=""/>
+        <p:cNvGrpSpPr/>
+        <p:nvPr/>
+      </p:nvGrpSpPr>
+      <p:grpSpPr>
+        <a:xfrm>
+          <a:off x="0" y="0"/>
+          <a:ext cx="0" cy="0"/>
+          <a:chOff x="0" y="0"/>
+          <a:chExt cx="0" cy="0"/>
+        </a:xfrm>
+      </p:grpSpPr>
+      <p:sp>
+        <p:nvSpPr>
+          <p:cNvPr id="2" name="Title 1"/>
+          <p:cNvSpPr>
+            <a:spLocks noGrp="1"/>
+          </p:cNvSpPr>
+          <p:nvPr>
+            <p:ph type="ctrTitle"/>
+          </p:nvPr>
+        </p:nvSpPr>
+        <p:spPr/>
+        <p:txBody>
+          <a:bodyPr wrap="square"/>
+          <a:lstStyle/>
+          <a:p>
+            <a:r>
+              <a:rPr sz="3600" b="1" i="0">
+                <a:solidFill>
+                  <a:srgbClr val="FFFFFF"/>
+                </a:solidFill>
+              </a:rPr>
+              <a:t>Clearing the Air</a:t>
+            </a:r>
+          </a:p>
+          <a:p>
+            <a:pPr>
+              <a:spcBef>
+                <a:spcPts val="600"/>
+              </a:spcBef>
+            </a:pPr>
+            <a:r>
+              <a:rPr sz="2200" b="0" i="0">
+                <a:solidFill>
+                  <a:srgbClr val="FFFFFF"/>
+                </a:solidFill>
+              </a:rPr>
+              <a:t>Evaluating the Impact of Leaded Fuel Bans on</a:t>
+            </a:r>
+          </a:p>
+          <a:p>
+            <a:r>
+              <a:rPr sz="2200" b="0" i="0">
+                <a:solidFill>
+                  <a:srgbClr val="FFFFFF"/>
+                </a:solidFill>
+              </a:rPr>
+              <a:t>Ambient Lead Levels at Reid-Hillview Airport</a:t>
+            </a:r>
+          </a:p>
+        </p:txBody>
+      </p:sp>
+      <p:sp>
+        <p:nvSpPr>
+          <p:cNvPr id="3" name="Subtitle 2"/>
+          <p:cNvSpPr>
+            <a:spLocks noGrp="1"/>
+          </p:cNvSpPr>
+          <p:nvPr>
+            <p:ph type="subTitle" idx="1"/>
+          </p:nvPr>
+        </p:nvSpPr>
+        <p:spPr>
+          <a:xfrm>
+            <a:off x="344984" y="4509120"/>
+            <a:ext cx="8897540" cy="1752600"/>
+          </a:xfrm>
+        </p:spPr>
+        <p:txBody>
+          <a:bodyPr wrap="square"/>
+          <a:lstStyle/>
+          <a:p>
+            <a:pPr algn="l"/>
+            <a:r>
+              <a:rPr sz="1600" b="1" i="0" dirty="0">
+                <a:solidFill>
+                  <a:srgbClr val="FFFFFF"/>
+                </a:solidFill>
+              </a:rPr>
+              <a:t>ECON62020  </a:t>
+            </a:r>
+            <a:endParaRPr lang="en-US" sz="1600" b="1" i="0" dirty="0">
+              <a:solidFill>
+                <a:srgbClr val="FFFFFF"/>
+              </a:solidFill>
+            </a:endParaRPr>
+          </a:p>
+          <a:p>
+            <a:pPr algn="l"/>
+            <a:r>
+              <a:rPr sz="1600" b="1" i="0" dirty="0">
+                <a:solidFill>
+                  <a:srgbClr val="FFFFFF"/>
+                </a:solidFill>
+              </a:rPr>
+              <a:t>Group Project Presentation</a:t>
+            </a:r>
+          </a:p>
+        </p:txBody>
+      </p:sp>
+    </p:spTree>
+  </p:cSld>
+  <p:clrMapOvr>
+    <a:masterClrMapping/>
+  </p:clrMapOvr>
+</p:sld>
+</file>
+
+<file path=ppt/slides/slide3.xml><?xml version="1.0" encoding="utf-8"?>
+<p:sld xmlns:a="http://schemas.openxmlformats.org/drawingml/2006/main" xmlns:r="http://schemas.openxmlformats.org/officeDocument/2006/relationships" xmlns:p="http://schemas.openxmlformats.org/presentationml/2006/main">
+  <p:cSld>
+    <p:spTree>
+      <p:nvGrpSpPr>
+        <p:cNvPr id="1" name=""/>
+        <p:cNvGrpSpPr/>
+        <p:nvPr/>
+      </p:nvGrpSpPr>
+      <p:grpSpPr>
+        <a:xfrm>
+          <a:off x="0" y="0"/>
+          <a:ext cx="0" cy="0"/>
+          <a:chOff x="0" y="0"/>
+          <a:chExt cx="0" cy="0"/>
+        </a:xfrm>
+      </p:grpSpPr>
+      <p:sp>
+        <p:nvSpPr>
+          <p:cNvPr id="2" name="Title 1"/>
+          <p:cNvSpPr>
+            <a:spLocks noGrp="1"/>
+          </p:cNvSpPr>
+          <p:nvPr>
+            <p:ph type="title"/>
+          </p:nvPr>
+        </p:nvSpPr>
+        <p:spPr/>
+        <p:txBody>
+          <a:bodyPr wrap="square"/>
+          <a:lstStyle/>
+          <a:p>
+            <a:r>
+              <a:rPr sz="2800" b="1" i="0" dirty="0">
+                <a:solidFill>
+                  <a:srgbClr val="660099"/>
+                </a:solidFill>
+              </a:rPr>
+              <a:t>Motivation &amp; Research Question</a:t>
+            </a:r>
+          </a:p>
+        </p:txBody>
+      </p:sp>
+      <p:pic>
+        <p:nvPicPr>
+          <p:cNvPr id="4" name="Picture 3" descr="uom_logo.png"/>
+          <p:cNvPicPr>
+            <a:picLocks noChangeAspect="1"/>
+          </p:cNvPicPr>
+          <p:nvPr/>
+        </p:nvPicPr>
+        <p:blipFill>
+          <a:blip r:embed="rId2"/>
+          <a:stretch>
+            <a:fillRect/>
+          </a:stretch>
+        </p:blipFill>
+        <p:spPr>
+          <a:xfrm>
+            <a:off x="10561320" y="274320"/>
+            <a:ext cx="1325880" cy="386080"/>
+          </a:xfrm>
+          <a:prstGeom prst="rect">
+            <a:avLst/>
+          </a:prstGeom>
+        </p:spPr>
+      </p:pic>
+      <p:sp>
+        <p:nvSpPr>
+          <p:cNvPr id="6" name="TextBox 5"/>
+          <p:cNvSpPr txBox="1"/>
+          <p:nvPr/>
+        </p:nvSpPr>
+        <p:spPr>
+          <a:xfrm>
+            <a:off x="502920" y="1691640"/>
+            <a:ext cx="5120640" cy="365760"/>
+          </a:xfrm>
+          <a:prstGeom prst="rect">
+            <a:avLst/>
+          </a:prstGeom>
+          <a:noFill/>
+        </p:spPr>
+        <p:txBody>
+          <a:bodyPr wrap="square" lIns="45720" tIns="18288" rIns="45720" bIns="18288">
+            <a:spAutoFit/>
+          </a:bodyPr>
+          <a:lstStyle/>
+          <a:p>
+            <a:r>
+              <a:rPr sz="1100" b="1" i="0" dirty="0">
+                <a:solidFill>
+                  <a:srgbClr val="660099"/>
+                </a:solidFill>
+              </a:rPr>
+              <a:t>WHY THIS MATTERS</a:t>
+            </a:r>
+          </a:p>
+        </p:txBody>
+      </p:sp>
+      <p:sp>
+        <p:nvSpPr>
+          <p:cNvPr id="7" name="TextBox 6"/>
+          <p:cNvSpPr txBox="1"/>
+          <p:nvPr/>
+        </p:nvSpPr>
+        <p:spPr>
+          <a:xfrm>
+            <a:off x="502920" y="2057400"/>
+            <a:ext cx="5303520" cy="2699200"/>
+          </a:xfrm>
+          <a:prstGeom prst="rect">
+            <a:avLst/>
+          </a:prstGeom>
+          <a:noFill/>
+        </p:spPr>
+        <p:txBody>
+          <a:bodyPr wrap="square" lIns="45720" tIns="18288" rIns="45720" bIns="18288">
+            <a:spAutoFit/>
+          </a:bodyPr>
+          <a:lstStyle/>
+          <a:p>
+            <a:pPr marL="285750" indent="-285750">
+              <a:spcAft>
+                <a:spcPts val="600"/>
+              </a:spcAft>
+              <a:buFont typeface="Arial" panose="020B0604020202020204" pitchFamily="34" charset="0"/>
+              <a:buChar char="•"/>
+            </a:pPr>
+            <a:r>
+              <a:rPr sz="1300" b="0" i="0" dirty="0">
+                <a:solidFill>
+                  <a:srgbClr val="333333"/>
+                </a:solidFill>
+              </a:rPr>
+              <a:t>Lead is a developmental neurotoxin with no safe exposure level (CDC, 2021).</a:t>
+            </a:r>
+            <a:endParaRPr lang="en-US" sz="1300" b="0" i="0" dirty="0">
+              <a:solidFill>
+                <a:srgbClr val="333333"/>
+              </a:solidFill>
+            </a:endParaRPr>
+          </a:p>
+          <a:p>
+            <a:pPr>
+              <a:spcAft>
+                <a:spcPts val="600"/>
+              </a:spcAft>
+            </a:pPr>
+            <a:endParaRPr lang="en-US" sz="1300" b="0" i="0" dirty="0">
+              <a:solidFill>
+                <a:srgbClr val="333333"/>
+              </a:solidFill>
+            </a:endParaRPr>
+          </a:p>
+          <a:p>
+            <a:pPr marL="285750" indent="-285750">
+              <a:spcAft>
+                <a:spcPts val="600"/>
+              </a:spcAft>
+              <a:buFont typeface="Arial" panose="020B0604020202020204" pitchFamily="34" charset="0"/>
+              <a:buChar char="•"/>
+            </a:pPr>
+            <a:r>
+              <a:rPr sz="1300" b="0" i="0" dirty="0">
+                <a:solidFill>
+                  <a:srgbClr val="333333"/>
+                </a:solidFill>
+              </a:rPr>
+              <a:t>Leaded avgas (100LL) is the largest remaining source of airborne Pb in the U.S. (EPA, 2022).</a:t>
+            </a:r>
+            <a:endParaRPr lang="en-US" sz="1300" b="0" i="0" dirty="0">
+              <a:solidFill>
+                <a:srgbClr val="333333"/>
+              </a:solidFill>
+            </a:endParaRPr>
+          </a:p>
+          <a:p>
+            <a:pPr>
+              <a:spcAft>
+                <a:spcPts val="600"/>
+              </a:spcAft>
+            </a:pPr>
+            <a:endParaRPr lang="en-US" sz="1300" b="0" i="0" dirty="0">
+              <a:solidFill>
+                <a:srgbClr val="333333"/>
+              </a:solidFill>
+            </a:endParaRPr>
+          </a:p>
+          <a:p>
+            <a:pPr marL="285750" indent="-285750">
+              <a:spcAft>
+                <a:spcPts val="600"/>
+              </a:spcAft>
+              <a:buFont typeface="Arial" panose="020B0604020202020204" pitchFamily="34" charset="0"/>
+              <a:buChar char="•"/>
+            </a:pPr>
+            <a:r>
+              <a:rPr sz="1300" b="0" i="0" dirty="0">
+                <a:solidFill>
+                  <a:srgbClr val="333333"/>
+                </a:solidFill>
+              </a:rPr>
+              <a:t>Reid-Hillview (RHV), San Jose, became the </a:t>
+            </a:r>
+            <a:r>
+              <a:rPr sz="1300" b="1" i="0" dirty="0">
+                <a:solidFill>
+                  <a:srgbClr val="4A006E"/>
+                </a:solidFill>
+              </a:rPr>
+              <a:t>first U.S. GA airport to ban leaded fuel</a:t>
+            </a:r>
+            <a:r>
+              <a:rPr sz="1300" b="0" i="0" dirty="0">
+                <a:solidFill>
+                  <a:srgbClr val="333333"/>
+                </a:solidFill>
+              </a:rPr>
+              <a:t> (Jan 2022).</a:t>
+            </a:r>
+            <a:endParaRPr lang="en-US" sz="1300" b="0" i="0" dirty="0">
+              <a:solidFill>
+                <a:srgbClr val="333333"/>
+              </a:solidFill>
+            </a:endParaRPr>
+          </a:p>
+          <a:p>
+            <a:pPr>
+              <a:spcAft>
+                <a:spcPts val="600"/>
+              </a:spcAft>
+            </a:pPr>
+            <a:endParaRPr lang="en-US" sz="1300" b="0" i="0" dirty="0">
+              <a:solidFill>
+                <a:srgbClr val="333333"/>
+              </a:solidFill>
+            </a:endParaRPr>
+          </a:p>
+          <a:p>
+            <a:pPr marL="285750" indent="-285750">
+              <a:spcAft>
+                <a:spcPts val="600"/>
+              </a:spcAft>
+              <a:buFont typeface="Arial" panose="020B0604020202020204" pitchFamily="34" charset="0"/>
+              <a:buChar char="•"/>
+            </a:pPr>
+            <a:r>
+              <a:rPr sz="1300" b="0" i="0" dirty="0">
+                <a:solidFill>
+                  <a:srgbClr val="333333"/>
+                </a:solidFill>
+              </a:rPr>
+              <a:t>Hollingsworth &amp; Rudik (2021) showed Pb travels up to 4km from airports  our radius choice.</a:t>
+            </a:r>
+          </a:p>
+        </p:txBody>
+      </p:sp>
+      <p:sp>
+        <p:nvSpPr>
+          <p:cNvPr id="8" name="Rectangle 7"/>
+          <p:cNvSpPr/>
+          <p:nvPr/>
+        </p:nvSpPr>
+        <p:spPr>
+          <a:xfrm>
+            <a:off x="6126480" y="1691640"/>
+            <a:ext cx="5715000" cy="4206240"/>
+          </a:xfrm>
+          <a:prstGeom prst="rect">
+            <a:avLst/>
+          </a:prstGeom>
+          <a:solidFill>
+            <a:srgbClr val="F5F1F8"/>
+          </a:solidFill>
+          <a:ln w="12700">
+            <a:solidFill>
+              <a:srgbClr val="660099"/>
+            </a:solidFill>
+          </a:ln>
+        </p:spPr>
+        <p:style>
+          <a:lnRef idx="1">
+            <a:schemeClr val="accent1"/>
+          </a:lnRef>
+          <a:fillRef idx="3">
+            <a:schemeClr val="accent1"/>
+          </a:fillRef>
+          <a:effectRef idx="2">
+            <a:schemeClr val="accent1"/>
+          </a:effectRef>
+          <a:fontRef idx="minor">
+            <a:schemeClr val="lt1"/>
+          </a:fontRef>
+        </p:style>
+        <p:txBody>
+          <a:bodyPr tIns="54864" bIns="54864" rtlCol="0" anchor="ctr"/>
+          <a:lstStyle/>
+          <a:p>
+            <a:pPr algn="ctr"/>
+            <a:endParaRPr/>
+          </a:p>
+        </p:txBody>
+      </p:sp>
+      <p:sp>
+        <p:nvSpPr>
+          <p:cNvPr id="10" name="TextBox 9"/>
+          <p:cNvSpPr txBox="1"/>
+          <p:nvPr/>
+        </p:nvSpPr>
+        <p:spPr>
+          <a:xfrm>
+            <a:off x="6400800" y="1874520"/>
+            <a:ext cx="5257800" cy="320040"/>
+          </a:xfrm>
+          <a:prstGeom prst="rect">
+            <a:avLst/>
+          </a:prstGeom>
+          <a:noFill/>
+        </p:spPr>
+        <p:txBody>
+          <a:bodyPr wrap="square" lIns="45720" tIns="18288" rIns="45720" bIns="18288">
+            <a:spAutoFit/>
+          </a:bodyPr>
+          <a:lstStyle/>
+          <a:p>
+            <a:r>
+              <a:rPr sz="1100" b="1" i="0">
+                <a:solidFill>
+                  <a:srgbClr val="660099"/>
+                </a:solidFill>
+              </a:rPr>
+              <a:t>RESEARCH QUESTION</a:t>
+            </a:r>
+          </a:p>
+        </p:txBody>
+      </p:sp>
+      <p:sp>
+        <p:nvSpPr>
+          <p:cNvPr id="11" name="TextBox 10"/>
+          <p:cNvSpPr txBox="1"/>
+          <p:nvPr/>
+        </p:nvSpPr>
+        <p:spPr>
+          <a:xfrm>
+            <a:off x="6400800" y="2194560"/>
+            <a:ext cx="5257800" cy="498598"/>
+          </a:xfrm>
+          <a:prstGeom prst="rect">
+            <a:avLst/>
+          </a:prstGeom>
+          <a:noFill/>
+        </p:spPr>
+        <p:txBody>
+          <a:bodyPr wrap="square" lIns="45720" tIns="18288" rIns="45720" bIns="18288">
+            <a:spAutoFit/>
+          </a:bodyPr>
+          <a:lstStyle/>
+          <a:p>
+            <a:r>
+              <a:rPr sz="1500" b="1" i="0" dirty="0">
+                <a:solidFill>
+                  <a:srgbClr val="1A1A1A"/>
+                </a:solidFill>
+              </a:rPr>
+              <a:t>Did the 2022 leaded-fuel ban at Reid-Hillview reduce ambient lead concentrations, relative to non-banning U.S. airports?</a:t>
+            </a:r>
+          </a:p>
+        </p:txBody>
+      </p:sp>
+      <p:sp>
+        <p:nvSpPr>
+          <p:cNvPr id="12" name="TextBox 11"/>
+          <p:cNvSpPr txBox="1"/>
+          <p:nvPr/>
+        </p:nvSpPr>
+        <p:spPr>
+          <a:xfrm>
+            <a:off x="6400800" y="3886200"/>
+            <a:ext cx="5257800" cy="274320"/>
+          </a:xfrm>
+          <a:prstGeom prst="rect">
+            <a:avLst/>
+          </a:prstGeom>
+          <a:noFill/>
+        </p:spPr>
+        <p:txBody>
+          <a:bodyPr wrap="square" lIns="45720" tIns="18288" rIns="45720" bIns="18288">
+            <a:spAutoFit/>
+          </a:bodyPr>
+          <a:lstStyle/>
+          <a:p>
+            <a:r>
+              <a:rPr sz="1000" b="1" i="0">
+                <a:solidFill>
+                  <a:srgbClr val="660099"/>
+                </a:solidFill>
+              </a:rPr>
+              <a:t>SUB-QUESTIONS</a:t>
+            </a:r>
+          </a:p>
+        </p:txBody>
+      </p:sp>
+      <p:sp>
+        <p:nvSpPr>
+          <p:cNvPr id="13" name="TextBox 12"/>
+          <p:cNvSpPr txBox="1"/>
+          <p:nvPr/>
+        </p:nvSpPr>
+        <p:spPr>
+          <a:xfrm>
+            <a:off x="6400800" y="4160520"/>
+            <a:ext cx="5257800" cy="221599"/>
+          </a:xfrm>
+          <a:prstGeom prst="rect">
+            <a:avLst/>
+          </a:prstGeom>
+          <a:noFill/>
+        </p:spPr>
+        <p:txBody>
+          <a:bodyPr wrap="square" lIns="45720" tIns="18288" rIns="45720" bIns="18288">
+            <a:spAutoFit/>
+          </a:bodyPr>
+          <a:lstStyle/>
+          <a:p>
+            <a:pPr>
+              <a:spcAft>
+                <a:spcPts val="400"/>
+              </a:spcAft>
+            </a:pPr>
+            <a:r>
+              <a:rPr sz="1200" b="0" i="0" dirty="0">
+                <a:solidFill>
+                  <a:srgbClr val="333333"/>
+                </a:solidFill>
+              </a:rPr>
+              <a:t>•  Is the effect robust to monitor radius (1, </a:t>
+            </a:r>
+            <a:r>
+              <a:rPr lang="en-US" sz="1200" b="0" i="0" dirty="0">
+                <a:solidFill>
+                  <a:srgbClr val="333333"/>
+                </a:solidFill>
+              </a:rPr>
+              <a:t>2, </a:t>
+            </a:r>
+            <a:r>
+              <a:rPr sz="1200" b="0" i="0" dirty="0">
+                <a:solidFill>
+                  <a:srgbClr val="333333"/>
+                </a:solidFill>
+              </a:rPr>
+              <a:t>3, 4 km)?</a:t>
+            </a:r>
+          </a:p>
+        </p:txBody>
+      </p:sp>
+    </p:spTree>
+  </p:cSld>
+  <p:clrMapOvr>
+    <a:masterClrMapping/>
+  </p:clrMapOvr>
+</p:sld>
+</file>
+
+<file path=ppt/slides/slide4.xml><?xml version="1.0" encoding="utf-8"?>
+<p:sld xmlns:a="http://schemas.openxmlformats.org/drawingml/2006/main" xmlns:r="http://schemas.openxmlformats.org/officeDocument/2006/relationships" xmlns:p="http://schemas.openxmlformats.org/presentationml/2006/main">
+  <p:cSld>
+    <p:spTree>
+      <p:nvGrpSpPr>
+        <p:cNvPr id="1" name=""/>
+        <p:cNvGrpSpPr/>
+        <p:nvPr/>
+      </p:nvGrpSpPr>
+      <p:grpSpPr>
+        <a:xfrm>
+          <a:off x="0" y="0"/>
+          <a:ext cx="0" cy="0"/>
+          <a:chOff x="0" y="0"/>
+          <a:chExt cx="0" cy="0"/>
+        </a:xfrm>
+      </p:grpSpPr>
+      <p:sp>
+        <p:nvSpPr>
+          <p:cNvPr id="2" name="Title 1"/>
+          <p:cNvSpPr>
+            <a:spLocks noGrp="1"/>
+          </p:cNvSpPr>
+          <p:nvPr>
+            <p:ph type="title"/>
+          </p:nvPr>
+        </p:nvSpPr>
+        <p:spPr/>
+        <p:txBody>
+          <a:bodyPr wrap="square"/>
+          <a:lstStyle/>
+          <a:p>
+            <a:r>
+              <a:rPr sz="2800" b="1" i="0" dirty="0">
+                <a:solidFill>
+                  <a:srgbClr val="660099"/>
+                </a:solidFill>
+              </a:rPr>
+              <a:t>Data &amp; Identification</a:t>
+            </a:r>
+          </a:p>
+        </p:txBody>
+      </p:sp>
+      <p:pic>
+        <p:nvPicPr>
+          <p:cNvPr id="4" name="Picture 3" descr="uom_logo.png"/>
+          <p:cNvPicPr>
+            <a:picLocks noChangeAspect="1"/>
+          </p:cNvPicPr>
+          <p:nvPr/>
+        </p:nvPicPr>
+        <p:blipFill>
+          <a:blip r:embed="rId2"/>
+          <a:stretch>
+            <a:fillRect/>
+          </a:stretch>
+        </p:blipFill>
+        <p:spPr>
+          <a:xfrm>
+            <a:off x="10561320" y="274320"/>
+            <a:ext cx="1325880" cy="386080"/>
+          </a:xfrm>
+          <a:prstGeom prst="rect">
+            <a:avLst/>
+          </a:prstGeom>
+        </p:spPr>
+      </p:pic>
+      <p:sp>
+        <p:nvSpPr>
+          <p:cNvPr id="5" name="Rectangle 4"/>
+          <p:cNvSpPr/>
+          <p:nvPr/>
+        </p:nvSpPr>
+        <p:spPr>
+          <a:xfrm>
+            <a:off x="338328" y="1645920"/>
+            <a:ext cx="3716528" cy="1554480"/>
+          </a:xfrm>
+          <a:prstGeom prst="rect">
+            <a:avLst/>
+          </a:prstGeom>
+          <a:solidFill>
+            <a:srgbClr val="FFFFFF"/>
+          </a:solidFill>
+          <a:ln w="9525">
+            <a:solidFill>
+              <a:schemeClr val="tx1"/>
+            </a:solidFill>
+          </a:ln>
+        </p:spPr>
+        <p:style>
+          <a:lnRef idx="1">
+            <a:schemeClr val="accent1"/>
+          </a:lnRef>
+          <a:fillRef idx="3">
+            <a:schemeClr val="accent1"/>
+          </a:fillRef>
+          <a:effectRef idx="2">
+            <a:schemeClr val="accent1"/>
+          </a:effectRef>
+          <a:fontRef idx="minor">
+            <a:schemeClr val="lt1"/>
+          </a:fontRef>
+        </p:style>
+        <p:txBody>
+          <a:bodyPr tIns="54864" bIns="54864" rtlCol="0" anchor="ctr"/>
+          <a:lstStyle/>
+          <a:p>
+            <a:pPr algn="ctr"/>
+            <a:endParaRPr>
+              <a:solidFill>
+                <a:schemeClr val="tx1"/>
+              </a:solidFill>
+            </a:endParaRPr>
+          </a:p>
+        </p:txBody>
+      </p:sp>
+      <p:sp>
+        <p:nvSpPr>
+          <p:cNvPr id="7" name="TextBox 6"/>
+          <p:cNvSpPr txBox="1"/>
+          <p:nvPr/>
+        </p:nvSpPr>
+        <p:spPr>
+          <a:xfrm>
+            <a:off x="475488" y="1783080"/>
+            <a:ext cx="3442208" cy="274320"/>
+          </a:xfrm>
+          <a:prstGeom prst="rect">
+            <a:avLst/>
+          </a:prstGeom>
+          <a:noFill/>
+        </p:spPr>
+        <p:txBody>
+          <a:bodyPr wrap="square" lIns="45720" tIns="18288" rIns="45720" bIns="18288">
+            <a:spAutoFit/>
+          </a:bodyPr>
+          <a:lstStyle/>
+          <a:p>
+            <a:r>
+              <a:rPr sz="900" b="1" i="0">
+                <a:solidFill>
+                  <a:srgbClr val="660099"/>
+                </a:solidFill>
+              </a:rPr>
+              <a:t>OUTCOME</a:t>
+            </a:r>
+          </a:p>
+        </p:txBody>
+      </p:sp>
+      <p:sp>
+        <p:nvSpPr>
+          <p:cNvPr id="8" name="TextBox 7"/>
+          <p:cNvSpPr txBox="1"/>
+          <p:nvPr/>
+        </p:nvSpPr>
+        <p:spPr>
+          <a:xfrm>
+            <a:off x="475488" y="2057400"/>
+            <a:ext cx="3442208" cy="365760"/>
+          </a:xfrm>
+          <a:prstGeom prst="rect">
+            <a:avLst/>
+          </a:prstGeom>
+          <a:noFill/>
+        </p:spPr>
+        <p:txBody>
+          <a:bodyPr wrap="square" lIns="45720" tIns="18288" rIns="45720" bIns="18288">
+            <a:spAutoFit/>
+          </a:bodyPr>
+          <a:lstStyle/>
+          <a:p>
+            <a:r>
+              <a:rPr sz="1400" b="1" i="0">
+                <a:solidFill>
+                  <a:srgbClr val="1A1A1A"/>
+                </a:solidFill>
+              </a:rPr>
+              <a:t>EPA AQS Pb</a:t>
+            </a:r>
+          </a:p>
+        </p:txBody>
+      </p:sp>
+      <p:sp>
+        <p:nvSpPr>
+          <p:cNvPr id="9" name="TextBox 8"/>
+          <p:cNvSpPr txBox="1"/>
+          <p:nvPr/>
+        </p:nvSpPr>
+        <p:spPr>
+          <a:xfrm>
+            <a:off x="475488" y="2423160"/>
+            <a:ext cx="3442208" cy="375487"/>
+          </a:xfrm>
+          <a:prstGeom prst="rect">
+            <a:avLst/>
+          </a:prstGeom>
+          <a:noFill/>
+        </p:spPr>
+        <p:txBody>
+          <a:bodyPr wrap="square" lIns="45720" tIns="18288" rIns="45720" bIns="18288">
+            <a:spAutoFit/>
+          </a:bodyPr>
+          <a:lstStyle/>
+          <a:p>
+            <a:r>
+              <a:rPr sz="1100" b="0" i="0" dirty="0">
+                <a:solidFill>
+                  <a:srgbClr val="333333"/>
+                </a:solidFill>
+              </a:rPr>
+              <a:t>Daily lead concentrations at U.S. monitors near airports. 2012–2025. Aggregated to monthly means.</a:t>
+            </a:r>
+          </a:p>
+        </p:txBody>
+      </p:sp>
+      <p:sp>
+        <p:nvSpPr>
+          <p:cNvPr id="10" name="Rectangle 9"/>
+          <p:cNvSpPr/>
+          <p:nvPr/>
+        </p:nvSpPr>
+        <p:spPr>
+          <a:xfrm>
+            <a:off x="4237736" y="1645920"/>
+            <a:ext cx="3716528" cy="1554480"/>
+          </a:xfrm>
+          <a:prstGeom prst="rect">
+            <a:avLst/>
+          </a:prstGeom>
+          <a:solidFill>
+            <a:srgbClr val="FFFFFF"/>
+          </a:solidFill>
+          <a:ln w="9525">
+            <a:solidFill>
+              <a:schemeClr val="tx1"/>
+            </a:solidFill>
+          </a:ln>
+        </p:spPr>
+        <p:style>
+          <a:lnRef idx="1">
+            <a:schemeClr val="accent1"/>
+          </a:lnRef>
+          <a:fillRef idx="3">
+            <a:schemeClr val="accent1"/>
+          </a:fillRef>
+          <a:effectRef idx="2">
+            <a:schemeClr val="accent1"/>
+          </a:effectRef>
+          <a:fontRef idx="minor">
+            <a:schemeClr val="lt1"/>
+          </a:fontRef>
+        </p:style>
+        <p:txBody>
+          <a:bodyPr tIns="54864" bIns="54864" rtlCol="0" anchor="ctr"/>
+          <a:lstStyle/>
+          <a:p>
+            <a:pPr algn="ctr"/>
+            <a:endParaRPr/>
+          </a:p>
+        </p:txBody>
+      </p:sp>
+      <p:sp>
+        <p:nvSpPr>
+          <p:cNvPr id="12" name="TextBox 11"/>
+          <p:cNvSpPr txBox="1"/>
+          <p:nvPr/>
+        </p:nvSpPr>
+        <p:spPr>
+          <a:xfrm>
+            <a:off x="4374896" y="1783080"/>
+            <a:ext cx="3442208" cy="274320"/>
+          </a:xfrm>
+          <a:prstGeom prst="rect">
+            <a:avLst/>
+          </a:prstGeom>
+          <a:noFill/>
+        </p:spPr>
+        <p:txBody>
+          <a:bodyPr wrap="square" lIns="45720" tIns="18288" rIns="45720" bIns="18288">
+            <a:spAutoFit/>
+          </a:bodyPr>
+          <a:lstStyle/>
+          <a:p>
+            <a:r>
+              <a:rPr sz="900" b="1" i="0">
+                <a:solidFill>
+                  <a:srgbClr val="660099"/>
+                </a:solidFill>
+              </a:rPr>
+              <a:t>TREATMENT</a:t>
+            </a:r>
+          </a:p>
+        </p:txBody>
+      </p:sp>
+      <p:sp>
+        <p:nvSpPr>
+          <p:cNvPr id="13" name="TextBox 12"/>
+          <p:cNvSpPr txBox="1"/>
+          <p:nvPr/>
+        </p:nvSpPr>
+        <p:spPr>
+          <a:xfrm>
+            <a:off x="4374896" y="2057400"/>
+            <a:ext cx="3442208" cy="365760"/>
+          </a:xfrm>
+          <a:prstGeom prst="rect">
+            <a:avLst/>
+          </a:prstGeom>
+          <a:noFill/>
+        </p:spPr>
+        <p:txBody>
+          <a:bodyPr wrap="square" lIns="45720" tIns="18288" rIns="45720" bIns="18288">
+            <a:spAutoFit/>
+          </a:bodyPr>
+          <a:lstStyle/>
+          <a:p>
+            <a:r>
+              <a:rPr sz="1400" b="1" i="0">
+                <a:solidFill>
+                  <a:srgbClr val="1A1A1A"/>
+                </a:solidFill>
+              </a:rPr>
+              <a:t>RHV ban (Jan 2022)</a:t>
+            </a:r>
+          </a:p>
+        </p:txBody>
+      </p:sp>
+      <p:sp>
+        <p:nvSpPr>
+          <p:cNvPr id="14" name="TextBox 13"/>
+          <p:cNvSpPr txBox="1"/>
+          <p:nvPr/>
+        </p:nvSpPr>
+        <p:spPr>
+          <a:xfrm>
+            <a:off x="4374896" y="2366676"/>
+            <a:ext cx="3442208" cy="883319"/>
+          </a:xfrm>
+          <a:prstGeom prst="rect">
+            <a:avLst/>
+          </a:prstGeom>
+          <a:noFill/>
+        </p:spPr>
+        <p:txBody>
+          <a:bodyPr wrap="square" lIns="45720" tIns="18288" rIns="45720" bIns="18288">
+            <a:spAutoFit/>
+          </a:bodyPr>
+          <a:lstStyle/>
+          <a:p>
+            <a:pPr marL="171450" indent="-171450">
+              <a:buFont typeface="Arial" panose="020B0604020202020204" pitchFamily="34" charset="0"/>
+              <a:buChar char="•"/>
+            </a:pPr>
+            <a:r>
+              <a:rPr sz="1100" b="0" i="0" dirty="0">
+                <a:solidFill>
+                  <a:srgbClr val="333333"/>
+                </a:solidFill>
+              </a:rPr>
+              <a:t>Reid-Hillview</a:t>
+            </a:r>
+            <a:r>
+              <a:rPr lang="en-US" sz="1100" b="0" i="0" dirty="0">
+                <a:solidFill>
+                  <a:srgbClr val="333333"/>
+                </a:solidFill>
+              </a:rPr>
+              <a:t>. </a:t>
+            </a:r>
+            <a:r>
+              <a:rPr sz="1100" b="0" i="0" dirty="0">
+                <a:solidFill>
+                  <a:srgbClr val="333333"/>
+                </a:solidFill>
+              </a:rPr>
+              <a:t>All other U.S.  airports with monitor coverage form the </a:t>
+            </a:r>
+            <a:r>
+              <a:rPr lang="en-US" sz="1100" b="0" i="0" dirty="0">
+                <a:solidFill>
+                  <a:srgbClr val="333333"/>
+                </a:solidFill>
+              </a:rPr>
+              <a:t>pool of potential controls</a:t>
+            </a:r>
+            <a:endParaRPr lang="en-US" sz="1100" dirty="0">
+              <a:solidFill>
+                <a:srgbClr val="333333"/>
+              </a:solidFill>
+            </a:endParaRPr>
+          </a:p>
+          <a:p>
+            <a:pPr marL="171450" indent="-171450">
+              <a:buFont typeface="Arial" panose="020B0604020202020204" pitchFamily="34" charset="0"/>
+              <a:buChar char="•"/>
+            </a:pPr>
+            <a:r>
+              <a:rPr lang="en-US" sz="1100" dirty="0">
+                <a:solidFill>
+                  <a:srgbClr val="333333"/>
+                </a:solidFill>
+              </a:rPr>
+              <a:t>Only 3 monitors within 1km of airports have continuous 2000–2025 data -&gt;  no clean control group.</a:t>
+            </a:r>
+          </a:p>
+          <a:p>
+            <a:endParaRPr sz="1100" b="0" i="0" dirty="0">
+              <a:solidFill>
+                <a:srgbClr val="333333"/>
+              </a:solidFill>
+            </a:endParaRPr>
+          </a:p>
+        </p:txBody>
+      </p:sp>
+      <p:sp>
+        <p:nvSpPr>
+          <p:cNvPr id="15" name="Rectangle 14"/>
+          <p:cNvSpPr/>
+          <p:nvPr/>
+        </p:nvSpPr>
+        <p:spPr>
+          <a:xfrm>
+            <a:off x="8137144" y="1645920"/>
+            <a:ext cx="3716528" cy="1554480"/>
+          </a:xfrm>
+          <a:prstGeom prst="rect">
+            <a:avLst/>
+          </a:prstGeom>
+          <a:solidFill>
+            <a:srgbClr val="FFFFFF"/>
+          </a:solidFill>
+          <a:ln w="9525">
+            <a:solidFill>
+              <a:schemeClr val="tx1"/>
+            </a:solidFill>
+          </a:ln>
+        </p:spPr>
+        <p:style>
+          <a:lnRef idx="1">
+            <a:schemeClr val="accent1"/>
+          </a:lnRef>
+          <a:fillRef idx="3">
+            <a:schemeClr val="accent1"/>
+          </a:fillRef>
+          <a:effectRef idx="2">
+            <a:schemeClr val="accent1"/>
+          </a:effectRef>
+          <a:fontRef idx="minor">
+            <a:schemeClr val="lt1"/>
+          </a:fontRef>
+        </p:style>
+        <p:txBody>
+          <a:bodyPr tIns="54864" bIns="54864" rtlCol="0" anchor="ctr"/>
+          <a:lstStyle/>
+          <a:p>
+            <a:pPr algn="ctr"/>
+            <a:endParaRPr/>
+          </a:p>
+        </p:txBody>
+      </p:sp>
+      <p:sp>
+        <p:nvSpPr>
+          <p:cNvPr id="17" name="TextBox 16"/>
+          <p:cNvSpPr txBox="1"/>
+          <p:nvPr/>
+        </p:nvSpPr>
+        <p:spPr>
+          <a:xfrm>
+            <a:off x="8274304" y="1783080"/>
+            <a:ext cx="3442208" cy="274320"/>
+          </a:xfrm>
+          <a:prstGeom prst="rect">
+            <a:avLst/>
+          </a:prstGeom>
+          <a:noFill/>
+        </p:spPr>
+        <p:txBody>
+          <a:bodyPr wrap="square" lIns="45720" tIns="18288" rIns="45720" bIns="18288">
+            <a:spAutoFit/>
+          </a:bodyPr>
+          <a:lstStyle/>
+          <a:p>
+            <a:r>
+              <a:rPr sz="900" b="1" i="0">
+                <a:solidFill>
+                  <a:srgbClr val="660099"/>
+                </a:solidFill>
+              </a:rPr>
+              <a:t>CONTROLS</a:t>
+            </a:r>
+          </a:p>
+        </p:txBody>
+      </p:sp>
+      <p:sp>
+        <p:nvSpPr>
+          <p:cNvPr id="18" name="TextBox 17"/>
+          <p:cNvSpPr txBox="1"/>
+          <p:nvPr/>
+        </p:nvSpPr>
+        <p:spPr>
+          <a:xfrm>
+            <a:off x="8274304" y="2057400"/>
+            <a:ext cx="3442208" cy="365760"/>
+          </a:xfrm>
+          <a:prstGeom prst="rect">
+            <a:avLst/>
+          </a:prstGeom>
+          <a:noFill/>
+        </p:spPr>
+        <p:txBody>
+          <a:bodyPr wrap="square" lIns="45720" tIns="18288" rIns="45720" bIns="18288">
+            <a:spAutoFit/>
+          </a:bodyPr>
+          <a:lstStyle/>
+          <a:p>
+            <a:r>
+              <a:rPr sz="1400" b="1" i="0">
+                <a:solidFill>
+                  <a:srgbClr val="1A1A1A"/>
+                </a:solidFill>
+              </a:rPr>
+              <a:t>NCEP Reanalysis</a:t>
+            </a:r>
+          </a:p>
+        </p:txBody>
+      </p:sp>
+      <p:sp>
+        <p:nvSpPr>
+          <p:cNvPr id="19" name="TextBox 18"/>
+          <p:cNvSpPr txBox="1"/>
+          <p:nvPr/>
+        </p:nvSpPr>
+        <p:spPr>
+          <a:xfrm>
+            <a:off x="8274304" y="2341599"/>
+            <a:ext cx="3442208" cy="544765"/>
+          </a:xfrm>
+          <a:prstGeom prst="rect">
+            <a:avLst/>
+          </a:prstGeom>
+          <a:noFill/>
+        </p:spPr>
+        <p:txBody>
+          <a:bodyPr wrap="square" lIns="45720" tIns="18288" rIns="45720" bIns="18288">
+            <a:spAutoFit/>
+          </a:bodyPr>
+          <a:lstStyle/>
+          <a:p>
+            <a:r>
+              <a:rPr sz="1100" b="0" i="0" dirty="0">
+                <a:solidFill>
+                  <a:srgbClr val="333333"/>
+                </a:solidFill>
+              </a:rPr>
+              <a:t>Daily air temp, wind speed, humidity, pressure (sigma 995). Spatial join to monitors.</a:t>
+            </a:r>
+            <a:r>
+              <a:rPr lang="en-US" sz="1100" b="0" i="0" dirty="0">
+                <a:solidFill>
+                  <a:srgbClr val="333333"/>
+                </a:solidFill>
+              </a:rPr>
+              <a:t> </a:t>
+            </a:r>
+          </a:p>
+          <a:p>
+            <a:endParaRPr sz="1100" b="0" i="0" dirty="0">
+              <a:solidFill>
+                <a:srgbClr val="333333"/>
+              </a:solidFill>
+            </a:endParaRPr>
+          </a:p>
+        </p:txBody>
+      </p:sp>
+      <p:sp>
+        <p:nvSpPr>
+          <p:cNvPr id="20" name="Rectangle 19"/>
+          <p:cNvSpPr/>
+          <p:nvPr/>
+        </p:nvSpPr>
+        <p:spPr>
+          <a:xfrm>
+            <a:off x="338328" y="3383280"/>
+            <a:ext cx="11515344" cy="2834640"/>
+          </a:xfrm>
+          <a:prstGeom prst="rect">
+            <a:avLst/>
+          </a:prstGeom>
+          <a:solidFill>
+            <a:srgbClr val="F5F1F8"/>
+          </a:solidFill>
+          <a:ln w="12700">
+            <a:solidFill>
+              <a:srgbClr val="660099"/>
+            </a:solidFill>
+          </a:ln>
+        </p:spPr>
+        <p:style>
+          <a:lnRef idx="1">
+            <a:schemeClr val="accent1"/>
+          </a:lnRef>
+          <a:fillRef idx="3">
+            <a:schemeClr val="accent1"/>
+          </a:fillRef>
+          <a:effectRef idx="2">
+            <a:schemeClr val="accent1"/>
+          </a:effectRef>
+          <a:fontRef idx="minor">
+            <a:schemeClr val="lt1"/>
+          </a:fontRef>
+        </p:style>
+        <p:txBody>
+          <a:bodyPr tIns="54864" bIns="54864" rtlCol="0" anchor="ctr"/>
+          <a:lstStyle/>
+          <a:p>
+            <a:pPr algn="ctr"/>
+            <a:endParaRPr lang="en-US" b="0" dirty="0"/>
+          </a:p>
+        </p:txBody>
+      </p:sp>
+      <p:sp>
+        <p:nvSpPr>
+          <p:cNvPr id="22" name="TextBox 21"/>
+          <p:cNvSpPr txBox="1"/>
+          <p:nvPr/>
+        </p:nvSpPr>
+        <p:spPr>
+          <a:xfrm>
+            <a:off x="548640" y="3520440"/>
+            <a:ext cx="5486400" cy="206210"/>
+          </a:xfrm>
+          <a:prstGeom prst="rect">
+            <a:avLst/>
+          </a:prstGeom>
+          <a:noFill/>
+        </p:spPr>
+        <p:txBody>
+          <a:bodyPr wrap="square" lIns="45720" tIns="18288" rIns="45720" bIns="18288">
+            <a:spAutoFit/>
+          </a:bodyPr>
+          <a:lstStyle/>
+          <a:p>
+            <a:r>
+              <a:rPr sz="1100" b="1" i="0" dirty="0">
+                <a:solidFill>
+                  <a:srgbClr val="660099"/>
+                </a:solidFill>
+              </a:rPr>
+              <a:t>IDENTIFICATION </a:t>
+            </a:r>
+            <a:r>
+              <a:rPr lang="en-US" sz="1100" b="1" dirty="0">
+                <a:solidFill>
+                  <a:srgbClr val="660099"/>
+                </a:solidFill>
+              </a:rPr>
+              <a:t>STRATEGY</a:t>
+            </a:r>
+            <a:endParaRPr sz="1100" b="1" i="0" dirty="0">
+              <a:solidFill>
+                <a:srgbClr val="660099"/>
+              </a:solidFill>
+            </a:endParaRPr>
+          </a:p>
+        </p:txBody>
+      </p:sp>
+      <mc:AlternateContent xmlns:mc="http://schemas.openxmlformats.org/markup-compatibility/2006">
+        <mc:Choice xmlns:a14="http://schemas.microsoft.com/office/drawing/2010/main" Requires="a14">
+          <p:sp>
+            <p:nvSpPr>
+              <p:cNvPr id="3" name="TextBox 2">
+                <a:extLst>
+                  <a:ext uri="{FF2B5EF4-FFF2-40B4-BE49-F238E27FC236}">
+                    <a16:creationId xmlns:a16="http://schemas.microsoft.com/office/drawing/2014/main" id="{ED084BD7-B346-21DC-63AF-1041E5837049}"/>
+                  </a:ext>
+                </a:extLst>
+              </p:cNvPr>
+              <p:cNvSpPr txBox="1"/>
+              <p:nvPr/>
+            </p:nvSpPr>
+            <p:spPr>
+              <a:xfrm>
+                <a:off x="767408" y="3822184"/>
+                <a:ext cx="10297144" cy="2862322"/>
+              </a:xfrm>
+              <a:prstGeom prst="rect">
+                <a:avLst/>
+              </a:prstGeom>
+              <a:noFill/>
+            </p:spPr>
+            <p:txBody>
+              <a:bodyPr wrap="square" rtlCol="0">
+                <a:spAutoFit/>
+              </a:bodyPr>
+              <a:lstStyle/>
+              <a:p>
+                <a14:m>
+                  <m:oMathPara xmlns:m="http://schemas.openxmlformats.org/officeDocument/2006/math">
+                    <m:oMathParaPr>
+                      <m:jc m:val="centerGroup"/>
+                    </m:oMathParaPr>
+                    <m:oMath xmlns:m="http://schemas.openxmlformats.org/officeDocument/2006/math">
+                      <m:func>
+                        <m:funcPr>
+                          <m:ctrlPr>
+                            <a:rPr lang="en-US" i="1" smtClean="0">
+                              <a:latin typeface="Cambria Math" panose="02040503050406030204" pitchFamily="18" charset="0"/>
+                            </a:rPr>
+                          </m:ctrlPr>
+                        </m:funcPr>
+                        <m:fName>
+                          <m:r>
+                            <m:rPr>
+                              <m:sty m:val="p"/>
+                            </m:rPr>
+                            <a:rPr lang="en-US">
+                              <a:latin typeface="Cambria Math" panose="02040503050406030204" pitchFamily="18" charset="0"/>
+                            </a:rPr>
+                            <m:t>log</m:t>
+                          </m:r>
+                        </m:fName>
+                        <m:e>
+                          <m:d>
+                            <m:dPr>
+                              <m:ctrlPr>
+                                <a:rPr lang="en-US" i="1">
+                                  <a:latin typeface="Cambria Math" panose="02040503050406030204" pitchFamily="18" charset="0"/>
+                                </a:rPr>
+                              </m:ctrlPr>
+                            </m:dPr>
+                            <m:e>
+                              <m:r>
+                                <a:rPr lang="en-US" i="1">
+                                  <a:latin typeface="Cambria Math" panose="02040503050406030204" pitchFamily="18" charset="0"/>
+                                </a:rPr>
+                                <m:t>𝐿𝑒𝑎</m:t>
+                              </m:r>
+                              <m:sSub>
+                                <m:sSubPr>
+                                  <m:ctrlPr>
+                                    <a:rPr lang="en-US" i="1">
+                                      <a:latin typeface="Cambria Math" panose="02040503050406030204" pitchFamily="18" charset="0"/>
+                                    </a:rPr>
+                                  </m:ctrlPr>
+                                </m:sSubPr>
+                                <m:e>
+                                  <m:r>
+                                    <a:rPr lang="en-US" i="1">
+                                      <a:latin typeface="Cambria Math" panose="02040503050406030204" pitchFamily="18" charset="0"/>
+                                    </a:rPr>
+                                    <m:t>𝑑</m:t>
+                                  </m:r>
+                                </m:e>
+                                <m:sub>
+                                  <m:r>
+                                    <a:rPr lang="en-US" i="1">
+                                      <a:latin typeface="Cambria Math" panose="02040503050406030204" pitchFamily="18" charset="0"/>
+                                    </a:rPr>
+                                    <m:t>𝑖𝑡</m:t>
+                                  </m:r>
+                                </m:sub>
+                              </m:sSub>
+                            </m:e>
+                          </m:d>
+                        </m:e>
+                      </m:func>
+                      <m:r>
+                        <a:rPr lang="en-US" i="1">
+                          <a:latin typeface="Cambria Math" panose="02040503050406030204" pitchFamily="18" charset="0"/>
+                        </a:rPr>
+                        <m:t>=</m:t>
+                      </m:r>
+                      <m:r>
+                        <a:rPr lang="en-US" i="1">
+                          <a:latin typeface="Cambria Math" panose="02040503050406030204" pitchFamily="18" charset="0"/>
+                        </a:rPr>
+                        <m:t>𝛽</m:t>
+                      </m:r>
+                      <m:r>
+                        <a:rPr lang="en-US" i="1">
+                          <a:latin typeface="Cambria Math" panose="02040503050406030204" pitchFamily="18" charset="0"/>
+                        </a:rPr>
+                        <m:t>∙</m:t>
+                      </m:r>
+                      <m:r>
+                        <a:rPr lang="en-US" i="1">
+                          <a:latin typeface="Cambria Math" panose="02040503050406030204" pitchFamily="18" charset="0"/>
+                        </a:rPr>
+                        <m:t>𝑇𝑟𝑒𝑎𝑡𝑒</m:t>
+                      </m:r>
+                      <m:sSub>
+                        <m:sSubPr>
+                          <m:ctrlPr>
+                            <a:rPr lang="en-US" i="1">
+                              <a:latin typeface="Cambria Math" panose="02040503050406030204" pitchFamily="18" charset="0"/>
+                            </a:rPr>
+                          </m:ctrlPr>
+                        </m:sSubPr>
+                        <m:e>
+                          <m:r>
+                            <a:rPr lang="en-US" i="1">
+                              <a:latin typeface="Cambria Math" panose="02040503050406030204" pitchFamily="18" charset="0"/>
+                            </a:rPr>
+                            <m:t>𝑑</m:t>
+                          </m:r>
+                        </m:e>
+                        <m:sub>
+                          <m:r>
+                            <a:rPr lang="en-US" i="1">
+                              <a:latin typeface="Cambria Math" panose="02040503050406030204" pitchFamily="18" charset="0"/>
+                            </a:rPr>
+                            <m:t>𝑖𝑡</m:t>
+                          </m:r>
+                        </m:sub>
+                      </m:sSub>
+                      <m:r>
+                        <a:rPr lang="en-US" i="1">
+                          <a:latin typeface="Cambria Math" panose="02040503050406030204" pitchFamily="18" charset="0"/>
+                        </a:rPr>
+                        <m:t>+</m:t>
+                      </m:r>
+                      <m:r>
+                        <a:rPr lang="en-US" i="1">
+                          <a:latin typeface="Cambria Math" panose="02040503050406030204" pitchFamily="18" charset="0"/>
+                        </a:rPr>
+                        <m:t>𝛾</m:t>
+                      </m:r>
+                      <m:sSub>
+                        <m:sSubPr>
+                          <m:ctrlPr>
+                            <a:rPr lang="en-US" i="1">
+                              <a:latin typeface="Cambria Math" panose="02040503050406030204" pitchFamily="18" charset="0"/>
+                            </a:rPr>
+                          </m:ctrlPr>
+                        </m:sSubPr>
+                        <m:e>
+                          <m:r>
+                            <a:rPr lang="en-US" i="1">
+                              <a:latin typeface="Cambria Math" panose="02040503050406030204" pitchFamily="18" charset="0"/>
+                            </a:rPr>
+                            <m:t>𝑋</m:t>
+                          </m:r>
+                        </m:e>
+                        <m:sub>
+                          <m:r>
+                            <a:rPr lang="en-US" i="1">
+                              <a:latin typeface="Cambria Math" panose="02040503050406030204" pitchFamily="18" charset="0"/>
+                            </a:rPr>
+                            <m:t>𝑖𝑡</m:t>
+                          </m:r>
+                        </m:sub>
+                      </m:sSub>
+                      <m:r>
+                        <a:rPr lang="en-US" i="1">
+                          <a:latin typeface="Cambria Math" panose="02040503050406030204" pitchFamily="18" charset="0"/>
+                        </a:rPr>
+                        <m:t>+</m:t>
+                      </m:r>
+                      <m:sSub>
+                        <m:sSubPr>
+                          <m:ctrlPr>
+                            <a:rPr lang="en-US" i="1">
+                              <a:latin typeface="Cambria Math" panose="02040503050406030204" pitchFamily="18" charset="0"/>
+                            </a:rPr>
+                          </m:ctrlPr>
+                        </m:sSubPr>
+                        <m:e>
+                          <m:r>
+                            <a:rPr lang="en-US" i="1">
+                              <a:latin typeface="Cambria Math" panose="02040503050406030204" pitchFamily="18" charset="0"/>
+                            </a:rPr>
+                            <m:t>𝛼</m:t>
+                          </m:r>
+                        </m:e>
+                        <m:sub>
+                          <m:r>
+                            <a:rPr lang="en-US" i="1">
+                              <a:latin typeface="Cambria Math" panose="02040503050406030204" pitchFamily="18" charset="0"/>
+                            </a:rPr>
+                            <m:t>𝑖</m:t>
+                          </m:r>
+                        </m:sub>
+                      </m:sSub>
+                      <m:r>
+                        <a:rPr lang="en-US" i="1">
+                          <a:latin typeface="Cambria Math" panose="02040503050406030204" pitchFamily="18" charset="0"/>
+                        </a:rPr>
+                        <m:t>+</m:t>
+                      </m:r>
+                      <m:sSub>
+                        <m:sSubPr>
+                          <m:ctrlPr>
+                            <a:rPr lang="en-US" i="1">
+                              <a:latin typeface="Cambria Math" panose="02040503050406030204" pitchFamily="18" charset="0"/>
+                            </a:rPr>
+                          </m:ctrlPr>
+                        </m:sSubPr>
+                        <m:e>
+                          <m:r>
+                            <a:rPr lang="en-US" i="1">
+                              <a:latin typeface="Cambria Math" panose="02040503050406030204" pitchFamily="18" charset="0"/>
+                            </a:rPr>
+                            <m:t>𝜆</m:t>
+                          </m:r>
+                        </m:e>
+                        <m:sub>
+                          <m:r>
+                            <a:rPr lang="en-US" i="1">
+                              <a:latin typeface="Cambria Math" panose="02040503050406030204" pitchFamily="18" charset="0"/>
+                            </a:rPr>
+                            <m:t>𝑡</m:t>
+                          </m:r>
+                        </m:sub>
+                      </m:sSub>
+                    </m:oMath>
+                  </m:oMathPara>
+                </a14:m>
+                <a:endParaRPr lang="en-US" i="1" dirty="0">
+                  <a:latin typeface="Cambria Math" panose="02040503050406030204" pitchFamily="18" charset="0"/>
+                </a:endParaRPr>
+              </a:p>
+              <a:p>
+                <a:pPr/>
+                <a:r>
+                  <a:rPr lang="en-US" dirty="0"/>
+                  <a:t>Where:</a:t>
+                </a:r>
+              </a:p>
+              <a:p>
+                <a:pPr marL="285750" indent="-285750">
+                  <a:buFont typeface="Arial" panose="020B0604020202020204" pitchFamily="34" charset="0"/>
+                  <a:buChar char="•"/>
+                </a:pPr>
+                <a14:m>
+                  <m:oMath xmlns:m="http://schemas.openxmlformats.org/officeDocument/2006/math">
+                    <m:func>
+                      <m:funcPr>
+                        <m:ctrlPr>
+                          <a:rPr lang="en-US" i="1">
+                            <a:latin typeface="Cambria Math" panose="02040503050406030204" pitchFamily="18" charset="0"/>
+                          </a:rPr>
+                        </m:ctrlPr>
+                      </m:funcPr>
+                      <m:fName>
+                        <m:r>
+                          <m:rPr>
+                            <m:sty m:val="p"/>
+                          </m:rPr>
+                          <a:rPr lang="en-US">
+                            <a:latin typeface="Cambria Math" panose="02040503050406030204" pitchFamily="18" charset="0"/>
+                          </a:rPr>
+                          <m:t>log</m:t>
+                        </m:r>
+                      </m:fName>
+                      <m:e>
+                        <m:d>
+                          <m:dPr>
+                            <m:ctrlPr>
+                              <a:rPr lang="en-US" i="1">
+                                <a:latin typeface="Cambria Math" panose="02040503050406030204" pitchFamily="18" charset="0"/>
+                              </a:rPr>
+                            </m:ctrlPr>
+                          </m:dPr>
+                          <m:e>
+                            <m:r>
+                              <a:rPr lang="en-US" i="1">
+                                <a:latin typeface="Cambria Math" panose="02040503050406030204" pitchFamily="18" charset="0"/>
+                              </a:rPr>
+                              <m:t>𝐿𝑒𝑎</m:t>
+                            </m:r>
+                            <m:sSub>
+                              <m:sSubPr>
+                                <m:ctrlPr>
+                                  <a:rPr lang="en-US" i="1">
+                                    <a:latin typeface="Cambria Math" panose="02040503050406030204" pitchFamily="18" charset="0"/>
+                                  </a:rPr>
+                                </m:ctrlPr>
+                              </m:sSubPr>
+                              <m:e>
+                                <m:r>
+                                  <a:rPr lang="en-US" i="1">
+                                    <a:latin typeface="Cambria Math" panose="02040503050406030204" pitchFamily="18" charset="0"/>
+                                  </a:rPr>
+                                  <m:t>𝑑</m:t>
+                                </m:r>
+                              </m:e>
+                              <m:sub>
+                                <m:r>
+                                  <a:rPr lang="en-US" i="1">
+                                    <a:latin typeface="Cambria Math" panose="02040503050406030204" pitchFamily="18" charset="0"/>
+                                  </a:rPr>
+                                  <m:t>𝑖𝑡</m:t>
+                                </m:r>
+                              </m:sub>
+                            </m:sSub>
+                          </m:e>
+                        </m:d>
+                      </m:e>
+                    </m:func>
+                  </m:oMath>
+                </a14:m>
+                <a:r>
+                  <a:rPr lang="en-GB" dirty="0"/>
+                  <a:t>is the log of the arithmetic mean of ambient lead concentration at monitor </a:t>
+                </a:r>
+                <a14:m>
+                  <m:oMath xmlns:m="http://schemas.openxmlformats.org/officeDocument/2006/math">
+                    <m:r>
+                      <a:rPr lang="en-US" i="1">
+                        <a:latin typeface="Cambria Math" panose="02040503050406030204" pitchFamily="18" charset="0"/>
+                      </a:rPr>
+                      <m:t>𝑖</m:t>
+                    </m:r>
+                  </m:oMath>
+                </a14:m>
+                <a:r>
+                  <a:rPr lang="en-GB" dirty="0"/>
+                  <a:t> at time </a:t>
+                </a:r>
+                <a14:m>
+                  <m:oMath xmlns:m="http://schemas.openxmlformats.org/officeDocument/2006/math">
+                    <m:r>
+                      <a:rPr lang="en-US" b="0" i="1" smtClean="0">
+                        <a:latin typeface="Cambria Math" panose="02040503050406030204" pitchFamily="18" charset="0"/>
+                      </a:rPr>
+                      <m:t>𝑡</m:t>
+                    </m:r>
+                  </m:oMath>
+                </a14:m>
+                <a:r>
+                  <a:rPr lang="en-GB" dirty="0"/>
+                  <a:t> </a:t>
+                </a:r>
+              </a:p>
+              <a:p>
+                <a:pPr marL="285750" indent="-285750">
+                  <a:buFont typeface="Arial" panose="020B0604020202020204" pitchFamily="34" charset="0"/>
+                  <a:buChar char="•"/>
+                </a:pPr>
+                <a:r>
+                  <a:rPr lang="en-GB" dirty="0"/>
+                  <a:t> </a:t>
+                </a:r>
+                <a14:m>
+                  <m:oMath xmlns:m="http://schemas.openxmlformats.org/officeDocument/2006/math">
+                    <m:r>
+                      <a:rPr lang="en-US" i="1">
+                        <a:latin typeface="Cambria Math" panose="02040503050406030204" pitchFamily="18" charset="0"/>
+                      </a:rPr>
+                      <m:t>𝑇𝑟𝑒𝑎𝑡𝑒</m:t>
+                    </m:r>
+                    <m:sSub>
+                      <m:sSubPr>
+                        <m:ctrlPr>
+                          <a:rPr lang="en-US" i="1">
+                            <a:latin typeface="Cambria Math" panose="02040503050406030204" pitchFamily="18" charset="0"/>
+                          </a:rPr>
+                        </m:ctrlPr>
+                      </m:sSubPr>
+                      <m:e>
+                        <m:r>
+                          <a:rPr lang="en-US" i="1">
+                            <a:latin typeface="Cambria Math" panose="02040503050406030204" pitchFamily="18" charset="0"/>
+                          </a:rPr>
+                          <m:t>𝑑</m:t>
+                        </m:r>
+                      </m:e>
+                      <m:sub>
+                        <m:r>
+                          <a:rPr lang="en-US" i="1">
+                            <a:latin typeface="Cambria Math" panose="02040503050406030204" pitchFamily="18" charset="0"/>
+                          </a:rPr>
+                          <m:t>𝑖𝑡</m:t>
+                        </m:r>
+                      </m:sub>
+                    </m:sSub>
+                  </m:oMath>
+                </a14:m>
+                <a:r>
+                  <a:rPr lang="en-GB" dirty="0"/>
+                  <a:t> is a dummy =1 if monitor is Reid Hillview and date </a:t>
+                </a:r>
+                <a14:m>
+                  <m:oMath xmlns:m="http://schemas.openxmlformats.org/officeDocument/2006/math">
+                    <m:r>
+                      <a:rPr lang="en-US" i="1" smtClean="0">
+                        <a:latin typeface="Cambria Math" panose="02040503050406030204" pitchFamily="18" charset="0"/>
+                        <a:ea typeface="Cambria Math" panose="02040503050406030204" pitchFamily="18" charset="0"/>
+                      </a:rPr>
+                      <m:t>≥</m:t>
+                    </m:r>
+                  </m:oMath>
+                </a14:m>
+                <a:r>
+                  <a:rPr lang="en-GB" dirty="0"/>
+                  <a:t> 2022</a:t>
+                </a:r>
+              </a:p>
+              <a:p>
+                <a:pPr marL="285750" indent="-285750">
+                  <a:buFont typeface="Arial" panose="020B0604020202020204" pitchFamily="34" charset="0"/>
+                  <a:buChar char="•"/>
+                </a:pPr>
+                <a14:m>
+                  <m:oMath xmlns:m="http://schemas.openxmlformats.org/officeDocument/2006/math">
+                    <m:sSub>
+                      <m:sSubPr>
+                        <m:ctrlPr>
+                          <a:rPr lang="en-US" i="1">
+                            <a:latin typeface="Cambria Math" panose="02040503050406030204" pitchFamily="18" charset="0"/>
+                          </a:rPr>
+                        </m:ctrlPr>
+                      </m:sSubPr>
+                      <m:e>
+                        <m:r>
+                          <a:rPr lang="en-US" i="1">
+                            <a:latin typeface="Cambria Math" panose="02040503050406030204" pitchFamily="18" charset="0"/>
+                          </a:rPr>
+                          <m:t>𝑋</m:t>
+                        </m:r>
+                      </m:e>
+                      <m:sub>
+                        <m:r>
+                          <a:rPr lang="en-US" i="1">
+                            <a:latin typeface="Cambria Math" panose="02040503050406030204" pitchFamily="18" charset="0"/>
+                          </a:rPr>
+                          <m:t>𝑖𝑡</m:t>
+                        </m:r>
+                      </m:sub>
+                    </m:sSub>
+                  </m:oMath>
+                </a14:m>
+                <a:r>
+                  <a:rPr lang="en-GB" dirty="0"/>
+                  <a:t> is a vector of weather controls: Temperature, Wind Speed and direction, Humidity, Pressure</a:t>
+                </a:r>
+              </a:p>
+              <a:p>
+                <a:pPr marL="285750" indent="-285750">
+                  <a:buFont typeface="Arial" panose="020B0604020202020204" pitchFamily="34" charset="0"/>
+                  <a:buChar char="•"/>
+                </a:pPr>
+                <a14:m>
+                  <m:oMath xmlns:m="http://schemas.openxmlformats.org/officeDocument/2006/math">
+                    <m:sSub>
+                      <m:sSubPr>
+                        <m:ctrlPr>
+                          <a:rPr lang="en-US" i="1">
+                            <a:latin typeface="Cambria Math" panose="02040503050406030204" pitchFamily="18" charset="0"/>
+                          </a:rPr>
+                        </m:ctrlPr>
+                      </m:sSubPr>
+                      <m:e>
+                        <m:r>
+                          <a:rPr lang="en-US" i="1">
+                            <a:latin typeface="Cambria Math" panose="02040503050406030204" pitchFamily="18" charset="0"/>
+                          </a:rPr>
+                          <m:t>𝛼</m:t>
+                        </m:r>
+                      </m:e>
+                      <m:sub>
+                        <m:r>
+                          <a:rPr lang="en-US" i="1">
+                            <a:latin typeface="Cambria Math" panose="02040503050406030204" pitchFamily="18" charset="0"/>
+                          </a:rPr>
+                          <m:t>𝑖</m:t>
+                        </m:r>
+                      </m:sub>
+                    </m:sSub>
+                    <m:r>
+                      <a:rPr lang="en-US" b="0" i="1" smtClean="0">
+                        <a:latin typeface="Cambria Math" panose="02040503050406030204" pitchFamily="18" charset="0"/>
+                      </a:rPr>
+                      <m:t> </m:t>
+                    </m:r>
+                  </m:oMath>
+                </a14:m>
+                <a:r>
+                  <a:rPr lang="en-GB" dirty="0"/>
+                  <a:t> are monitor fixed effects</a:t>
+                </a:r>
+              </a:p>
+              <a:p>
+                <a:pPr marL="285750" indent="-285750">
+                  <a:buFont typeface="Arial" panose="020B0604020202020204" pitchFamily="34" charset="0"/>
+                  <a:buChar char="•"/>
+                </a:pPr>
+                <a14:m>
+                  <m:oMath xmlns:m="http://schemas.openxmlformats.org/officeDocument/2006/math">
+                    <m:sSub>
+                      <m:sSubPr>
+                        <m:ctrlPr>
+                          <a:rPr lang="en-US" i="1">
+                            <a:latin typeface="Cambria Math" panose="02040503050406030204" pitchFamily="18" charset="0"/>
+                          </a:rPr>
+                        </m:ctrlPr>
+                      </m:sSubPr>
+                      <m:e>
+                        <m:r>
+                          <a:rPr lang="en-US" i="1">
+                            <a:latin typeface="Cambria Math" panose="02040503050406030204" pitchFamily="18" charset="0"/>
+                          </a:rPr>
+                          <m:t>𝜆</m:t>
+                        </m:r>
+                      </m:e>
+                      <m:sub>
+                        <m:r>
+                          <a:rPr lang="en-US" i="1">
+                            <a:latin typeface="Cambria Math" panose="02040503050406030204" pitchFamily="18" charset="0"/>
+                          </a:rPr>
+                          <m:t>𝑡</m:t>
+                        </m:r>
+                      </m:sub>
+                    </m:sSub>
+                  </m:oMath>
+                </a14:m>
+                <a:r>
+                  <a:rPr lang="en-GB" dirty="0"/>
+                  <a:t> captures time fixed effects</a:t>
+                </a:r>
+              </a:p>
+              <a:p>
+                <a:pPr marL="285750" indent="-285750">
+                  <a:buFont typeface="Arial" panose="020B0604020202020204" pitchFamily="34" charset="0"/>
+                  <a:buChar char="•"/>
+                </a:pPr>
+                <a:endParaRPr lang="en-GB" dirty="0"/>
+              </a:p>
+              <a:p>
+                <a:pPr marL="285750" indent="-285750">
+                  <a:buFont typeface="Arial" panose="020B0604020202020204" pitchFamily="34" charset="0"/>
+                  <a:buChar char="•"/>
+                </a:pPr>
+                <a:endParaRPr lang="en-GB" dirty="0"/>
+              </a:p>
+              <a:p>
+                <a:pPr marL="285750" indent="-285750">
+                  <a:buFont typeface="Arial" panose="020B0604020202020204" pitchFamily="34" charset="0"/>
+                  <a:buChar char="•"/>
+                </a:pPr>
+                <a:endParaRPr lang="en-GB" dirty="0"/>
+              </a:p>
+            </p:txBody>
+          </p:sp>
+        </mc:Choice>
+        <mc:Fallback>
+          <p:sp>
+            <p:nvSpPr>
+              <p:cNvPr id="3" name="TextBox 2">
+                <a:extLst>
+                  <a:ext uri="{FF2B5EF4-FFF2-40B4-BE49-F238E27FC236}">
+                    <a16:creationId xmlns:a16="http://schemas.microsoft.com/office/drawing/2014/main" id="{ED084BD7-B346-21DC-63AF-1041E5837049}"/>
+                  </a:ext>
+                </a:extLst>
+              </p:cNvPr>
+              <p:cNvSpPr txBox="1">
+                <a:spLocks noRot="1" noChangeAspect="1" noMove="1" noResize="1" noEditPoints="1" noAdjustHandles="1" noChangeArrowheads="1" noChangeShapeType="1" noTextEdit="1"/>
+              </p:cNvSpPr>
+              <p:nvPr/>
+            </p:nvSpPr>
+            <p:spPr>
+              <a:xfrm>
+                <a:off x="767408" y="3822184"/>
+                <a:ext cx="10297144" cy="2862322"/>
+              </a:xfrm>
+              <a:prstGeom prst="rect">
+                <a:avLst/>
+              </a:prstGeom>
+              <a:blipFill>
+                <a:blip r:embed="rId3"/>
+                <a:stretch>
+                  <a:fillRect l="-533"/>
+                </a:stretch>
+              </a:blipFill>
+            </p:spPr>
+            <p:txBody>
+              <a:bodyPr/>
+              <a:lstStyle/>
+              <a:p>
+                <a:r>
+                  <a:rPr lang="en-GB">
+                    <a:noFill/>
+                  </a:rPr>
+                  <a:t> </a:t>
+                </a:r>
+              </a:p>
+            </p:txBody>
+          </p:sp>
+        </mc:Fallback>
+      </mc:AlternateContent>
+    </p:spTree>
+  </p:cSld>
+  <p:clrMapOvr>
+    <a:masterClrMapping/>
+  </p:clrMapOvr>
+</p:sld>
+</file>
+
+<file path=ppt/slides/slide5.xml><?xml version="1.0" encoding="utf-8"?>
+<p:sld xmlns:a="http://schemas.openxmlformats.org/drawingml/2006/main" xmlns:r="http://schemas.openxmlformats.org/officeDocument/2006/relationships" xmlns:p="http://schemas.openxmlformats.org/presentationml/2006/main">
+  <p:cSld>
+    <p:spTree>
+      <p:nvGrpSpPr>
+        <p:cNvPr id="1" name=""/>
+        <p:cNvGrpSpPr/>
+        <p:nvPr/>
+      </p:nvGrpSpPr>
+      <p:grpSpPr>
+        <a:xfrm>
+          <a:off x="0" y="0"/>
+          <a:ext cx="0" cy="0"/>
+          <a:chOff x="0" y="0"/>
+          <a:chExt cx="0" cy="0"/>
+        </a:xfrm>
+      </p:grpSpPr>
+      <p:sp>
+        <p:nvSpPr>
+          <p:cNvPr id="2" name="Title 1"/>
+          <p:cNvSpPr>
+            <a:spLocks noGrp="1"/>
+          </p:cNvSpPr>
+          <p:nvPr>
+            <p:ph type="title"/>
+          </p:nvPr>
+        </p:nvSpPr>
+        <p:spPr>
+          <a:xfrm>
+            <a:off x="355257" y="350426"/>
+            <a:ext cx="11506799" cy="1128839"/>
+          </a:xfrm>
+        </p:spPr>
+        <p:txBody>
+          <a:bodyPr wrap="square"/>
+          <a:lstStyle/>
+          <a:p>
+            <a:r>
+              <a:rPr sz="2800" b="1" i="0" dirty="0">
+                <a:solidFill>
+                  <a:srgbClr val="660099"/>
+                </a:solidFill>
+              </a:rPr>
+              <a:t>Results</a:t>
+            </a:r>
+          </a:p>
+        </p:txBody>
+      </p:sp>
+      <p:pic>
+        <p:nvPicPr>
+          <p:cNvPr id="4" name="Picture 3" descr="uom_logo.png"/>
+          <p:cNvPicPr>
+            <a:picLocks noChangeAspect="1"/>
+          </p:cNvPicPr>
+          <p:nvPr/>
+        </p:nvPicPr>
+        <p:blipFill>
+          <a:blip r:embed="rId2"/>
+          <a:stretch>
+            <a:fillRect/>
+          </a:stretch>
+        </p:blipFill>
+        <p:spPr>
+          <a:xfrm>
+            <a:off x="10561320" y="274320"/>
+            <a:ext cx="1325880" cy="386080"/>
+          </a:xfrm>
+          <a:prstGeom prst="rect">
+            <a:avLst/>
+          </a:prstGeom>
+        </p:spPr>
+      </p:pic>
+      <p:pic>
+        <p:nvPicPr>
+          <p:cNvPr id="36" name="Picture 35">
+            <a:extLst>
+              <a:ext uri="{FF2B5EF4-FFF2-40B4-BE49-F238E27FC236}">
+                <a16:creationId xmlns:a16="http://schemas.microsoft.com/office/drawing/2014/main" id="{A857948D-13FC-EAFE-8DB3-28A8F1A37A90}"/>
+              </a:ext>
+            </a:extLst>
+          </p:cNvPr>
+          <p:cNvPicPr>
+            <a:picLocks noChangeAspect="1"/>
+          </p:cNvPicPr>
+          <p:nvPr/>
+        </p:nvPicPr>
+        <p:blipFill>
+          <a:blip r:embed="rId3"/>
+          <a:stretch>
+            <a:fillRect/>
+          </a:stretch>
+        </p:blipFill>
+        <p:spPr>
+          <a:xfrm>
+            <a:off x="6350648" y="1340769"/>
+            <a:ext cx="5360297" cy="4320480"/>
+          </a:xfrm>
+          <a:prstGeom prst="rect">
+            <a:avLst/>
+          </a:prstGeom>
+        </p:spPr>
+      </p:pic>
+      <p:graphicFrame>
+        <p:nvGraphicFramePr>
+          <p:cNvPr id="40" name="Table 39">
+            <a:extLst>
+              <a:ext uri="{FF2B5EF4-FFF2-40B4-BE49-F238E27FC236}">
+                <a16:creationId xmlns:a16="http://schemas.microsoft.com/office/drawing/2014/main" id="{668CD1C1-14CC-0728-9B9A-8BB080952080}"/>
+              </a:ext>
+            </a:extLst>
+          </p:cNvPr>
+          <p:cNvGraphicFramePr>
+            <a:graphicFrameLocks noGrp="1"/>
+          </p:cNvGraphicFramePr>
+          <p:nvPr/>
+        </p:nvGraphicFramePr>
+        <p:xfrm>
+          <a:off x="675313" y="2559337"/>
+          <a:ext cx="4988640" cy="1010920"/>
+        </p:xfrm>
+        <a:graphic>
+          <a:graphicData uri="http://schemas.openxmlformats.org/drawingml/2006/table">
+            <a:tbl>
+              <a:tblPr firstRow="1" bandRow="1">
+                <a:tableStyleId>{93296810-A885-4BE3-A3E7-6D5BEEA58F35}</a:tableStyleId>
+              </a:tblPr>
+              <a:tblGrid>
+                <a:gridCol w="1662880">
+                  <a:extLst>
+                    <a:ext uri="{9D8B030D-6E8A-4147-A177-3AD203B41FA5}">
+                      <a16:colId xmlns:a16="http://schemas.microsoft.com/office/drawing/2014/main" val="357104987"/>
+                    </a:ext>
+                  </a:extLst>
+                </a:gridCol>
+                <a:gridCol w="1662880">
+                  <a:extLst>
+                    <a:ext uri="{9D8B030D-6E8A-4147-A177-3AD203B41FA5}">
+                      <a16:colId xmlns:a16="http://schemas.microsoft.com/office/drawing/2014/main" val="2295857429"/>
+                    </a:ext>
+                  </a:extLst>
+                </a:gridCol>
+                <a:gridCol w="1662880">
+                  <a:extLst>
+                    <a:ext uri="{9D8B030D-6E8A-4147-A177-3AD203B41FA5}">
+                      <a16:colId xmlns:a16="http://schemas.microsoft.com/office/drawing/2014/main" val="392463162"/>
+                    </a:ext>
+                  </a:extLst>
+                </a:gridCol>
+              </a:tblGrid>
+              <a:tr h="370840">
+                <a:tc>
+                  <a:txBody>
+                    <a:bodyPr/>
+                    <a:lstStyle/>
+                    <a:p>
+                      <a:r>
+                        <a:rPr lang="en-US" dirty="0">
+                          <a:solidFill>
+                            <a:schemeClr val="tx1"/>
+                          </a:solidFill>
+                        </a:rPr>
+                        <a:t>Specification</a:t>
+                      </a:r>
+                      <a:endParaRPr lang="en-GB" dirty="0">
+                        <a:solidFill>
+                          <a:schemeClr val="tx1"/>
+                        </a:solidFill>
+                      </a:endParaRPr>
+                    </a:p>
+                  </a:txBody>
+                  <a:tcPr/>
+                </a:tc>
+                <a:tc>
+                  <a:txBody>
+                    <a:bodyPr/>
+                    <a:lstStyle/>
+                    <a:p>
+                      <a:r>
+                        <a:rPr lang="en-US" dirty="0">
+                          <a:solidFill>
+                            <a:schemeClr val="tx1"/>
+                          </a:solidFill>
+                        </a:rPr>
+                        <a:t>Estimate</a:t>
+                      </a:r>
+                      <a:endParaRPr lang="en-GB" dirty="0">
+                        <a:solidFill>
+                          <a:schemeClr val="tx1"/>
+                        </a:solidFill>
+                      </a:endParaRPr>
+                    </a:p>
+                  </a:txBody>
+                  <a:tcPr/>
+                </a:tc>
+                <a:tc>
+                  <a:txBody>
+                    <a:bodyPr/>
+                    <a:lstStyle/>
+                    <a:p>
+                      <a:r>
+                        <a:rPr lang="en-US" dirty="0">
+                          <a:solidFill>
+                            <a:schemeClr val="tx1"/>
+                          </a:solidFill>
+                        </a:rPr>
+                        <a:t>Number of Controls</a:t>
+                      </a:r>
+                      <a:endParaRPr lang="en-GB" dirty="0">
+                        <a:solidFill>
+                          <a:schemeClr val="tx1"/>
+                        </a:solidFill>
+                      </a:endParaRPr>
+                    </a:p>
+                  </a:txBody>
+                  <a:tcPr/>
+                </a:tc>
+                <a:extLst>
+                  <a:ext uri="{0D108BD9-81ED-4DB2-BD59-A6C34878D82A}">
+                    <a16:rowId xmlns:a16="http://schemas.microsoft.com/office/drawing/2014/main" val="81033561"/>
+                  </a:ext>
+                </a:extLst>
+              </a:tr>
+              <a:tr h="370840">
+                <a:tc>
+                  <a:txBody>
+                    <a:bodyPr/>
+                    <a:lstStyle/>
+                    <a:p>
+                      <a:r>
+                        <a:rPr lang="en-US" dirty="0"/>
+                        <a:t>Airports only</a:t>
+                      </a:r>
+                      <a:endParaRPr lang="en-GB" dirty="0"/>
+                    </a:p>
+                  </a:txBody>
+                  <a:tcPr/>
+                </a:tc>
+                <a:tc>
+                  <a:txBody>
+                    <a:bodyPr/>
+                    <a:lstStyle/>
+                    <a:p>
+                      <a:endParaRPr lang="en-GB"/>
+                    </a:p>
+                  </a:txBody>
+                  <a:tcPr/>
+                </a:tc>
+                <a:tc>
+                  <a:txBody>
+                    <a:bodyPr/>
+                    <a:lstStyle/>
+                    <a:p>
+                      <a:endParaRPr lang="en-GB" dirty="0"/>
+                    </a:p>
+                  </a:txBody>
+                  <a:tcPr/>
+                </a:tc>
+                <a:extLst>
+                  <a:ext uri="{0D108BD9-81ED-4DB2-BD59-A6C34878D82A}">
+                    <a16:rowId xmlns:a16="http://schemas.microsoft.com/office/drawing/2014/main" val="585704262"/>
+                  </a:ext>
+                </a:extLst>
+              </a:tr>
+            </a:tbl>
+          </a:graphicData>
+        </a:graphic>
+      </p:graphicFrame>
+      <p:sp>
+        <p:nvSpPr>
+          <p:cNvPr id="42" name="TextBox 41">
+            <a:extLst>
+              <a:ext uri="{FF2B5EF4-FFF2-40B4-BE49-F238E27FC236}">
+                <a16:creationId xmlns:a16="http://schemas.microsoft.com/office/drawing/2014/main" id="{907DA32B-872B-2D3E-8FB0-4EB130F4F769}"/>
+              </a:ext>
+            </a:extLst>
+          </p:cNvPr>
+          <p:cNvSpPr txBox="1"/>
+          <p:nvPr/>
+        </p:nvSpPr>
+        <p:spPr>
+          <a:xfrm>
+            <a:off x="121633" y="5517232"/>
+            <a:ext cx="6096000" cy="523220"/>
+          </a:xfrm>
+          <a:prstGeom prst="rect">
+            <a:avLst/>
+          </a:prstGeom>
+          <a:noFill/>
+        </p:spPr>
+        <p:txBody>
+          <a:bodyPr wrap="square">
+            <a:spAutoFit/>
+          </a:bodyPr>
+          <a:lstStyle/>
+          <a:p>
+            <a:r>
+              <a:rPr lang="en-US" sz="1400" b="0" i="0" dirty="0">
+                <a:solidFill>
+                  <a:srgbClr val="333333"/>
+                </a:solidFill>
+              </a:rPr>
+              <a:t>Note: 0-1km refers to the specification for which only monitors within a 1km radius of an airport were used in the control group </a:t>
+            </a:r>
+            <a:endParaRPr lang="en-GB" sz="1400" dirty="0"/>
+          </a:p>
+        </p:txBody>
+      </p:sp>
+    </p:spTree>
+  </p:cSld>
+  <p:clrMapOvr>
+    <a:masterClrMapping/>
+  </p:clrMapOvr>
+</p:sld>
+</file>
+
+<file path=ppt/slides/slide6.xml><?xml version="1.0" encoding="utf-8"?>
+<p:sld xmlns:a="http://schemas.openxmlformats.org/drawingml/2006/main" xmlns:r="http://schemas.openxmlformats.org/officeDocument/2006/relationships" xmlns:p="http://schemas.openxmlformats.org/presentationml/2006/main">
+  <p:cSld>
+    <p:spTree>
+      <p:nvGrpSpPr>
+        <p:cNvPr id="1" name=""/>
+        <p:cNvGrpSpPr/>
+        <p:nvPr/>
+      </p:nvGrpSpPr>
+      <p:grpSpPr>
+        <a:xfrm>
+          <a:off x="0" y="0"/>
+          <a:ext cx="0" cy="0"/>
+          <a:chOff x="0" y="0"/>
+          <a:chExt cx="0" cy="0"/>
+        </a:xfrm>
+      </p:grpSpPr>
+      <p:sp>
+        <p:nvSpPr>
+          <p:cNvPr id="2" name="Title 1"/>
+          <p:cNvSpPr>
+            <a:spLocks noGrp="1"/>
+          </p:cNvSpPr>
+          <p:nvPr>
+            <p:ph type="title"/>
+          </p:nvPr>
+        </p:nvSpPr>
+        <p:spPr/>
+        <p:txBody>
+          <a:bodyPr wrap="square"/>
+          <a:lstStyle/>
+          <a:p>
+            <a:r>
+              <a:rPr sz="2800" b="1" i="0">
+                <a:solidFill>
+                  <a:srgbClr val="660099"/>
+                </a:solidFill>
+              </a:rPr>
+              <a:t>Robustness, Takeaways &amp; Q&amp;A</a:t>
+            </a:r>
+          </a:p>
+        </p:txBody>
+      </p:sp>
+      <p:pic>
+        <p:nvPicPr>
+          <p:cNvPr id="4" name="Picture 3" descr="uom_logo.png"/>
+          <p:cNvPicPr>
+            <a:picLocks noChangeAspect="1"/>
+          </p:cNvPicPr>
+          <p:nvPr/>
+        </p:nvPicPr>
+        <p:blipFill>
+          <a:blip r:embed="rId2"/>
+          <a:stretch>
+            <a:fillRect/>
+          </a:stretch>
+        </p:blipFill>
+        <p:spPr>
+          <a:xfrm>
+            <a:off x="10561320" y="274320"/>
+            <a:ext cx="1325880" cy="386080"/>
+          </a:xfrm>
+          <a:prstGeom prst="rect">
+            <a:avLst/>
+          </a:prstGeom>
+        </p:spPr>
+      </p:pic>
+      <p:sp>
+        <p:nvSpPr>
+          <p:cNvPr id="5" name="TextBox 4"/>
+          <p:cNvSpPr txBox="1"/>
+          <p:nvPr/>
+        </p:nvSpPr>
+        <p:spPr>
+          <a:xfrm>
+            <a:off x="338328" y="1645920"/>
+            <a:ext cx="5486400" cy="274320"/>
+          </a:xfrm>
+          <a:prstGeom prst="rect">
+            <a:avLst/>
+          </a:prstGeom>
+          <a:noFill/>
+        </p:spPr>
+        <p:txBody>
+          <a:bodyPr wrap="square" lIns="45720" tIns="18288" rIns="45720" bIns="18288">
+            <a:spAutoFit/>
+          </a:bodyPr>
+          <a:lstStyle/>
+          <a:p>
+            <a:r>
+              <a:rPr sz="1100" b="1" i="0">
+                <a:solidFill>
+                  <a:srgbClr val="660099"/>
+                </a:solidFill>
+              </a:rPr>
+              <a:t>ROBUSTNESS — RADIUS SENSITIVITY</a:t>
+            </a:r>
+          </a:p>
+        </p:txBody>
+      </p:sp>
+      <p:sp>
+        <p:nvSpPr>
+          <p:cNvPr id="39" name="TextBox 38"/>
+          <p:cNvSpPr txBox="1"/>
+          <p:nvPr/>
+        </p:nvSpPr>
+        <p:spPr>
+          <a:xfrm>
+            <a:off x="6035040" y="1645920"/>
+            <a:ext cx="5852160" cy="274320"/>
+          </a:xfrm>
+          <a:prstGeom prst="rect">
+            <a:avLst/>
+          </a:prstGeom>
+          <a:noFill/>
+        </p:spPr>
+        <p:txBody>
+          <a:bodyPr wrap="square" lIns="45720" tIns="18288" rIns="45720" bIns="18288">
+            <a:spAutoFit/>
+          </a:bodyPr>
+          <a:lstStyle/>
+          <a:p>
+            <a:r>
+              <a:rPr sz="1100" b="1" i="0">
+                <a:solidFill>
+                  <a:srgbClr val="660099"/>
+                </a:solidFill>
+              </a:rPr>
+              <a:t>TAKEAWAYS</a:t>
+            </a:r>
+          </a:p>
+        </p:txBody>
+      </p:sp>
+      <p:sp>
+        <p:nvSpPr>
+          <p:cNvPr id="40" name="Rectangle 39"/>
+          <p:cNvSpPr/>
+          <p:nvPr/>
+        </p:nvSpPr>
+        <p:spPr>
+          <a:xfrm>
+            <a:off x="6035040" y="2011680"/>
+            <a:ext cx="54864" cy="960120"/>
+          </a:xfrm>
+          <a:prstGeom prst="rect">
+            <a:avLst/>
+          </a:prstGeom>
+          <a:solidFill>
+            <a:srgbClr val="660099"/>
+          </a:solidFill>
+          <a:ln>
+            <a:noFill/>
+          </a:ln>
+        </p:spPr>
+        <p:style>
+          <a:lnRef idx="1">
+            <a:schemeClr val="accent1"/>
+          </a:lnRef>
+          <a:fillRef idx="3">
+            <a:schemeClr val="accent1"/>
+          </a:fillRef>
+          <a:effectRef idx="2">
+            <a:schemeClr val="accent1"/>
+          </a:effectRef>
+          <a:fontRef idx="minor">
+            <a:schemeClr val="lt1"/>
+          </a:fontRef>
+        </p:style>
+        <p:txBody>
+          <a:bodyPr tIns="54864" bIns="54864" rtlCol="0" anchor="ctr"/>
+          <a:lstStyle/>
+          <a:p>
+            <a:pPr algn="ctr"/>
+            <a:endParaRPr/>
+          </a:p>
+        </p:txBody>
+      </p:sp>
+      <p:sp>
+        <p:nvSpPr>
+          <p:cNvPr id="41" name="TextBox 40"/>
+          <p:cNvSpPr txBox="1"/>
+          <p:nvPr/>
+        </p:nvSpPr>
+        <p:spPr>
+          <a:xfrm>
+            <a:off x="6199631" y="2011680"/>
+            <a:ext cx="5623560" cy="292608"/>
+          </a:xfrm>
+          <a:prstGeom prst="rect">
+            <a:avLst/>
+          </a:prstGeom>
+          <a:noFill/>
+        </p:spPr>
+        <p:txBody>
+          <a:bodyPr wrap="square" lIns="45720" tIns="18288" rIns="45720" bIns="18288">
+            <a:spAutoFit/>
+          </a:bodyPr>
+          <a:lstStyle/>
+          <a:p>
+            <a:r>
+              <a:rPr sz="1300" b="1" i="0">
+                <a:solidFill>
+                  <a:srgbClr val="1A1A1A"/>
+                </a:solidFill>
+              </a:rPr>
+              <a:t>Method that fits the data</a:t>
+            </a:r>
+          </a:p>
+        </p:txBody>
+      </p:sp>
+      <p:sp>
+        <p:nvSpPr>
+          <p:cNvPr id="42" name="TextBox 41"/>
+          <p:cNvSpPr txBox="1"/>
+          <p:nvPr/>
+        </p:nvSpPr>
+        <p:spPr>
+          <a:xfrm>
+            <a:off x="6199631" y="2304288"/>
+            <a:ext cx="5623560" cy="206210"/>
+          </a:xfrm>
+          <a:prstGeom prst="rect">
+            <a:avLst/>
+          </a:prstGeom>
+          <a:noFill/>
+        </p:spPr>
+        <p:txBody>
+          <a:bodyPr wrap="square" lIns="45720" tIns="18288" rIns="45720" bIns="18288">
+            <a:spAutoFit/>
+          </a:bodyPr>
+          <a:lstStyle/>
+          <a:p>
+            <a:r>
+              <a:rPr lang="en-US" sz="1100" dirty="0">
+                <a:solidFill>
+                  <a:srgbClr val="333333"/>
+                </a:solidFill>
+              </a:rPr>
+              <a:t>……</a:t>
+            </a:r>
+            <a:endParaRPr sz="1100" b="0" i="0" dirty="0">
+              <a:solidFill>
+                <a:srgbClr val="333333"/>
+              </a:solidFill>
+            </a:endParaRPr>
+          </a:p>
+        </p:txBody>
+      </p:sp>
+      <p:sp>
+        <p:nvSpPr>
+          <p:cNvPr id="43" name="Rectangle 42"/>
+          <p:cNvSpPr/>
+          <p:nvPr/>
+        </p:nvSpPr>
+        <p:spPr>
+          <a:xfrm>
+            <a:off x="6035040" y="3108960"/>
+            <a:ext cx="54864" cy="960120"/>
+          </a:xfrm>
+          <a:prstGeom prst="rect">
+            <a:avLst/>
+          </a:prstGeom>
+          <a:solidFill>
+            <a:srgbClr val="660099"/>
+          </a:solidFill>
+          <a:ln>
+            <a:noFill/>
+          </a:ln>
+        </p:spPr>
+        <p:style>
+          <a:lnRef idx="1">
+            <a:schemeClr val="accent1"/>
+          </a:lnRef>
+          <a:fillRef idx="3">
+            <a:schemeClr val="accent1"/>
+          </a:fillRef>
+          <a:effectRef idx="2">
+            <a:schemeClr val="accent1"/>
+          </a:effectRef>
+          <a:fontRef idx="minor">
+            <a:schemeClr val="lt1"/>
+          </a:fontRef>
+        </p:style>
+        <p:txBody>
+          <a:bodyPr tIns="54864" bIns="54864" rtlCol="0" anchor="ctr"/>
+          <a:lstStyle/>
+          <a:p>
+            <a:pPr algn="ctr"/>
+            <a:endParaRPr/>
+          </a:p>
+        </p:txBody>
+      </p:sp>
+      <p:sp>
+        <p:nvSpPr>
+          <p:cNvPr id="44" name="TextBox 43"/>
+          <p:cNvSpPr txBox="1"/>
+          <p:nvPr/>
+        </p:nvSpPr>
+        <p:spPr>
+          <a:xfrm>
+            <a:off x="6199631" y="3108960"/>
+            <a:ext cx="5623560" cy="292608"/>
+          </a:xfrm>
+          <a:prstGeom prst="rect">
+            <a:avLst/>
+          </a:prstGeom>
+          <a:noFill/>
+        </p:spPr>
+        <p:txBody>
+          <a:bodyPr wrap="square" lIns="45720" tIns="18288" rIns="45720" bIns="18288">
+            <a:spAutoFit/>
+          </a:bodyPr>
+          <a:lstStyle/>
+          <a:p>
+            <a:r>
+              <a:rPr sz="1300" b="1" i="0">
+                <a:solidFill>
+                  <a:srgbClr val="1A1A1A"/>
+                </a:solidFill>
+              </a:rPr>
+              <a:t>First evidence on a 100LL ban</a:t>
+            </a:r>
+          </a:p>
+        </p:txBody>
+      </p:sp>
+      <p:sp>
+        <p:nvSpPr>
+          <p:cNvPr id="45" name="TextBox 44"/>
+          <p:cNvSpPr txBox="1"/>
+          <p:nvPr/>
+        </p:nvSpPr>
+        <p:spPr>
+          <a:xfrm>
+            <a:off x="6199631" y="3401568"/>
+            <a:ext cx="5623560" cy="685800"/>
+          </a:xfrm>
+          <a:prstGeom prst="rect">
+            <a:avLst/>
+          </a:prstGeom>
+          <a:noFill/>
+        </p:spPr>
+        <p:txBody>
+          <a:bodyPr wrap="square" lIns="45720" tIns="18288" rIns="45720" bIns="18288">
+            <a:spAutoFit/>
+          </a:bodyPr>
+          <a:lstStyle/>
+          <a:p>
+            <a:r>
+              <a:rPr sz="1100" b="0" i="0" dirty="0">
+                <a:solidFill>
+                  <a:srgbClr val="333333"/>
+                </a:solidFill>
+              </a:rPr>
+              <a:t>Quantifies what a real-world leaded-fuel ban delivers in ambient Pb — informing FAA’s 2030 phase-out.</a:t>
+            </a:r>
+          </a:p>
+        </p:txBody>
+      </p:sp>
+      <p:sp>
+        <p:nvSpPr>
+          <p:cNvPr id="46" name="Rectangle 45"/>
+          <p:cNvSpPr/>
+          <p:nvPr/>
+        </p:nvSpPr>
+        <p:spPr>
+          <a:xfrm>
+            <a:off x="6035040" y="4206240"/>
+            <a:ext cx="54864" cy="960120"/>
+          </a:xfrm>
+          <a:prstGeom prst="rect">
+            <a:avLst/>
+          </a:prstGeom>
+          <a:solidFill>
+            <a:srgbClr val="660099"/>
+          </a:solidFill>
+          <a:ln>
+            <a:noFill/>
+          </a:ln>
+        </p:spPr>
+        <p:style>
+          <a:lnRef idx="1">
+            <a:schemeClr val="accent1"/>
+          </a:lnRef>
+          <a:fillRef idx="3">
+            <a:schemeClr val="accent1"/>
+          </a:fillRef>
+          <a:effectRef idx="2">
+            <a:schemeClr val="accent1"/>
+          </a:effectRef>
+          <a:fontRef idx="minor">
+            <a:schemeClr val="lt1"/>
+          </a:fontRef>
+        </p:style>
+        <p:txBody>
+          <a:bodyPr tIns="54864" bIns="54864" rtlCol="0" anchor="ctr"/>
+          <a:lstStyle/>
+          <a:p>
+            <a:pPr algn="ctr"/>
+            <a:endParaRPr/>
+          </a:p>
+        </p:txBody>
+      </p:sp>
+      <p:sp>
+        <p:nvSpPr>
+          <p:cNvPr id="47" name="TextBox 46"/>
+          <p:cNvSpPr txBox="1"/>
+          <p:nvPr/>
+        </p:nvSpPr>
+        <p:spPr>
+          <a:xfrm>
+            <a:off x="6199631" y="4206240"/>
+            <a:ext cx="5623560" cy="292608"/>
+          </a:xfrm>
+          <a:prstGeom prst="rect">
+            <a:avLst/>
+          </a:prstGeom>
+          <a:noFill/>
+        </p:spPr>
+        <p:txBody>
+          <a:bodyPr wrap="square" lIns="45720" tIns="18288" rIns="45720" bIns="18288">
+            <a:spAutoFit/>
+          </a:bodyPr>
+          <a:lstStyle/>
+          <a:p>
+            <a:r>
+              <a:rPr sz="1300" b="1" i="0">
+                <a:solidFill>
+                  <a:srgbClr val="1A1A1A"/>
+                </a:solidFill>
+              </a:rPr>
+              <a:t>Honest about scope</a:t>
+            </a:r>
+          </a:p>
+        </p:txBody>
+      </p:sp>
+      <p:sp>
+        <p:nvSpPr>
+          <p:cNvPr id="48" name="TextBox 47"/>
+          <p:cNvSpPr txBox="1"/>
+          <p:nvPr/>
+        </p:nvSpPr>
+        <p:spPr>
+          <a:xfrm>
+            <a:off x="6199631" y="4498848"/>
+            <a:ext cx="5623560" cy="206210"/>
+          </a:xfrm>
+          <a:prstGeom prst="rect">
+            <a:avLst/>
+          </a:prstGeom>
+          <a:noFill/>
+        </p:spPr>
+        <p:txBody>
+          <a:bodyPr wrap="square" lIns="45720" tIns="18288" rIns="45720" bIns="18288">
+            <a:spAutoFit/>
+          </a:bodyPr>
+          <a:lstStyle/>
+          <a:p>
+            <a:r>
+              <a:rPr lang="en-US" sz="1100" b="0" i="0" dirty="0">
+                <a:solidFill>
+                  <a:srgbClr val="333333"/>
+                </a:solidFill>
+              </a:rPr>
+              <a:t>…..</a:t>
+            </a:r>
+            <a:r>
+              <a:rPr sz="1100" b="0" i="0" dirty="0">
+                <a:solidFill>
+                  <a:srgbClr val="333333"/>
+                </a:solidFill>
+              </a:rPr>
+              <a:t>.</a:t>
+            </a:r>
+          </a:p>
+        </p:txBody>
+      </p:sp>
+      <p:sp>
+        <p:nvSpPr>
+          <p:cNvPr id="49" name="Rectangle 48"/>
+          <p:cNvSpPr/>
+          <p:nvPr/>
+        </p:nvSpPr>
+        <p:spPr>
+          <a:xfrm>
+            <a:off x="338328" y="5577840"/>
+            <a:ext cx="11515344" cy="640080"/>
+          </a:xfrm>
+          <a:prstGeom prst="rect">
+            <a:avLst/>
+          </a:prstGeom>
+          <a:solidFill>
+            <a:srgbClr val="660099"/>
+          </a:solidFill>
+          <a:ln>
+            <a:noFill/>
+          </a:ln>
+        </p:spPr>
+        <p:style>
+          <a:lnRef idx="1">
+            <a:schemeClr val="accent1"/>
+          </a:lnRef>
+          <a:fillRef idx="3">
+            <a:schemeClr val="accent1"/>
+          </a:fillRef>
+          <a:effectRef idx="2">
+            <a:schemeClr val="accent1"/>
+          </a:effectRef>
+          <a:fontRef idx="minor">
+            <a:schemeClr val="lt1"/>
+          </a:fontRef>
+        </p:style>
+        <p:txBody>
+          <a:bodyPr tIns="54864" bIns="54864" rtlCol="0" anchor="ctr"/>
+          <a:lstStyle/>
+          <a:p>
+            <a:pPr algn="ctr"/>
+            <a:endParaRPr/>
+          </a:p>
+        </p:txBody>
+      </p:sp>
+      <p:sp>
+        <p:nvSpPr>
+          <p:cNvPr id="50" name="TextBox 49"/>
+          <p:cNvSpPr txBox="1"/>
+          <p:nvPr/>
+        </p:nvSpPr>
+        <p:spPr>
+          <a:xfrm>
+            <a:off x="338328" y="5696712"/>
+            <a:ext cx="11515344" cy="375487"/>
+          </a:xfrm>
+          <a:prstGeom prst="rect">
+            <a:avLst/>
+          </a:prstGeom>
+          <a:noFill/>
+        </p:spPr>
+        <p:txBody>
+          <a:bodyPr wrap="square" lIns="45720" tIns="18288" rIns="45720" bIns="18288">
+            <a:spAutoFit/>
+          </a:bodyPr>
+          <a:lstStyle/>
+          <a:p>
+            <a:pPr algn="ctr"/>
+            <a:r>
+              <a:rPr lang="en-US" sz="2200" b="1" i="0" dirty="0">
+                <a:solidFill>
+                  <a:srgbClr val="FFFFFF"/>
+                </a:solidFill>
+              </a:rPr>
+              <a:t>Any </a:t>
+            </a:r>
+            <a:r>
+              <a:rPr sz="2200" b="1" i="0" dirty="0">
+                <a:solidFill>
+                  <a:srgbClr val="FFFFFF"/>
+                </a:solidFill>
+              </a:rPr>
+              <a:t>Questions?</a:t>
+            </a:r>
+          </a:p>
+        </p:txBody>
+      </p:sp>
+      <p:graphicFrame>
+        <p:nvGraphicFramePr>
+          <p:cNvPr id="3" name="Table 2">
+            <a:extLst>
+              <a:ext uri="{FF2B5EF4-FFF2-40B4-BE49-F238E27FC236}">
+                <a16:creationId xmlns:a16="http://schemas.microsoft.com/office/drawing/2014/main" id="{7C0A62FA-1CF1-68AE-76B3-78D024E6BDEC}"/>
+              </a:ext>
+            </a:extLst>
+          </p:cNvPr>
+          <p:cNvGraphicFramePr>
+            <a:graphicFrameLocks noGrp="1"/>
+          </p:cNvGraphicFramePr>
+          <p:nvPr/>
+        </p:nvGraphicFramePr>
+        <p:xfrm>
+          <a:off x="335817" y="2157984"/>
+          <a:ext cx="4988640" cy="2865120"/>
+        </p:xfrm>
+        <a:graphic>
+          <a:graphicData uri="http://schemas.openxmlformats.org/drawingml/2006/table">
+            <a:tbl>
+              <a:tblPr firstRow="1" bandRow="1">
+                <a:tableStyleId>{93296810-A885-4BE3-A3E7-6D5BEEA58F35}</a:tableStyleId>
+              </a:tblPr>
+              <a:tblGrid>
+                <a:gridCol w="1662880">
+                  <a:extLst>
+                    <a:ext uri="{9D8B030D-6E8A-4147-A177-3AD203B41FA5}">
+                      <a16:colId xmlns:a16="http://schemas.microsoft.com/office/drawing/2014/main" val="2965034298"/>
+                    </a:ext>
+                  </a:extLst>
+                </a:gridCol>
+                <a:gridCol w="1662880">
+                  <a:extLst>
+                    <a:ext uri="{9D8B030D-6E8A-4147-A177-3AD203B41FA5}">
+                      <a16:colId xmlns:a16="http://schemas.microsoft.com/office/drawing/2014/main" val="4124081154"/>
+                    </a:ext>
+                  </a:extLst>
+                </a:gridCol>
+                <a:gridCol w="1662880">
+                  <a:extLst>
+                    <a:ext uri="{9D8B030D-6E8A-4147-A177-3AD203B41FA5}">
+                      <a16:colId xmlns:a16="http://schemas.microsoft.com/office/drawing/2014/main" val="1591125841"/>
+                    </a:ext>
+                  </a:extLst>
+                </a:gridCol>
+              </a:tblGrid>
+              <a:tr h="370840">
+                <a:tc>
+                  <a:txBody>
+                    <a:bodyPr/>
+                    <a:lstStyle/>
+                    <a:p>
+                      <a:r>
+                        <a:rPr lang="en-US" dirty="0">
+                          <a:solidFill>
+                            <a:schemeClr val="tx1"/>
+                          </a:solidFill>
+                        </a:rPr>
+                        <a:t>Specification</a:t>
+                      </a:r>
+                      <a:endParaRPr lang="en-GB" dirty="0">
+                        <a:solidFill>
+                          <a:schemeClr val="tx1"/>
+                        </a:solidFill>
+                      </a:endParaRPr>
+                    </a:p>
+                  </a:txBody>
+                  <a:tcPr/>
+                </a:tc>
+                <a:tc>
+                  <a:txBody>
+                    <a:bodyPr/>
+                    <a:lstStyle/>
+                    <a:p>
+                      <a:r>
+                        <a:rPr lang="en-US" dirty="0">
+                          <a:solidFill>
+                            <a:schemeClr val="tx1"/>
+                          </a:solidFill>
+                        </a:rPr>
+                        <a:t>Estimate</a:t>
+                      </a:r>
+                      <a:endParaRPr lang="en-GB" dirty="0">
+                        <a:solidFill>
+                          <a:schemeClr val="tx1"/>
+                        </a:solidFill>
+                      </a:endParaRPr>
+                    </a:p>
+                  </a:txBody>
+                  <a:tcPr/>
+                </a:tc>
+                <a:tc>
+                  <a:txBody>
+                    <a:bodyPr/>
+                    <a:lstStyle/>
+                    <a:p>
+                      <a:r>
+                        <a:rPr lang="en-US" dirty="0">
+                          <a:solidFill>
+                            <a:schemeClr val="tx1"/>
+                          </a:solidFill>
+                        </a:rPr>
+                        <a:t>Number of Controls</a:t>
+                      </a:r>
+                      <a:endParaRPr lang="en-GB" dirty="0">
+                        <a:solidFill>
+                          <a:schemeClr val="tx1"/>
+                        </a:solidFill>
+                      </a:endParaRPr>
+                    </a:p>
+                  </a:txBody>
+                  <a:tcPr/>
+                </a:tc>
+                <a:extLst>
+                  <a:ext uri="{0D108BD9-81ED-4DB2-BD59-A6C34878D82A}">
+                    <a16:rowId xmlns:a16="http://schemas.microsoft.com/office/drawing/2014/main" val="369336498"/>
+                  </a:ext>
+                </a:extLst>
+              </a:tr>
+              <a:tr h="370840">
+                <a:tc>
+                  <a:txBody>
+                    <a:bodyPr/>
+                    <a:lstStyle/>
+                    <a:p>
+                      <a:r>
+                        <a:rPr lang="en-US" dirty="0"/>
+                        <a:t>Airports only</a:t>
+                      </a:r>
+                      <a:endParaRPr lang="en-GB" dirty="0"/>
+                    </a:p>
+                  </a:txBody>
+                  <a:tcPr/>
+                </a:tc>
+                <a:tc>
+                  <a:txBody>
+                    <a:bodyPr/>
+                    <a:lstStyle/>
+                    <a:p>
+                      <a:endParaRPr lang="en-GB"/>
+                    </a:p>
+                  </a:txBody>
+                  <a:tcPr/>
+                </a:tc>
+                <a:tc>
+                  <a:txBody>
+                    <a:bodyPr/>
+                    <a:lstStyle/>
+                    <a:p>
+                      <a:endParaRPr lang="en-GB" dirty="0"/>
+                    </a:p>
+                  </a:txBody>
+                  <a:tcPr/>
+                </a:tc>
+                <a:extLst>
+                  <a:ext uri="{0D108BD9-81ED-4DB2-BD59-A6C34878D82A}">
+                    <a16:rowId xmlns:a16="http://schemas.microsoft.com/office/drawing/2014/main" val="1158743893"/>
+                  </a:ext>
+                </a:extLst>
+              </a:tr>
+              <a:tr h="370840">
+                <a:tc>
+                  <a:txBody>
+                    <a:bodyPr/>
+                    <a:lstStyle/>
+                    <a:p>
+                      <a:r>
+                        <a:rPr lang="en-US" dirty="0"/>
+                        <a:t>0-1 km</a:t>
+                      </a:r>
+                      <a:endParaRPr lang="en-GB" dirty="0"/>
+                    </a:p>
+                  </a:txBody>
+                  <a:tcPr/>
+                </a:tc>
+                <a:tc>
+                  <a:txBody>
+                    <a:bodyPr/>
+                    <a:lstStyle/>
+                    <a:p>
+                      <a:endParaRPr lang="en-GB" dirty="0"/>
+                    </a:p>
+                  </a:txBody>
+                  <a:tcPr/>
+                </a:tc>
+                <a:tc>
+                  <a:txBody>
+                    <a:bodyPr/>
+                    <a:lstStyle/>
+                    <a:p>
+                      <a:endParaRPr lang="en-GB"/>
+                    </a:p>
+                  </a:txBody>
+                  <a:tcPr/>
+                </a:tc>
+                <a:extLst>
+                  <a:ext uri="{0D108BD9-81ED-4DB2-BD59-A6C34878D82A}">
+                    <a16:rowId xmlns:a16="http://schemas.microsoft.com/office/drawing/2014/main" val="3008028119"/>
+                  </a:ext>
+                </a:extLst>
+              </a:tr>
+              <a:tr h="370840">
+                <a:tc>
+                  <a:txBody>
+                    <a:bodyPr/>
+                    <a:lstStyle/>
+                    <a:p>
+                      <a:r>
+                        <a:rPr lang="en-US" dirty="0"/>
+                        <a:t>0-2 km </a:t>
+                      </a:r>
+                      <a:endParaRPr lang="en-GB" dirty="0"/>
+                    </a:p>
+                  </a:txBody>
+                  <a:tcPr/>
+                </a:tc>
+                <a:tc>
+                  <a:txBody>
+                    <a:bodyPr/>
+                    <a:lstStyle/>
+                    <a:p>
+                      <a:endParaRPr lang="en-GB" dirty="0"/>
+                    </a:p>
+                  </a:txBody>
+                  <a:tcPr/>
+                </a:tc>
+                <a:tc>
+                  <a:txBody>
+                    <a:bodyPr/>
+                    <a:lstStyle/>
+                    <a:p>
+                      <a:endParaRPr lang="en-GB" dirty="0"/>
+                    </a:p>
+                  </a:txBody>
+                  <a:tcPr/>
+                </a:tc>
+                <a:extLst>
+                  <a:ext uri="{0D108BD9-81ED-4DB2-BD59-A6C34878D82A}">
+                    <a16:rowId xmlns:a16="http://schemas.microsoft.com/office/drawing/2014/main" val="3080172999"/>
+                  </a:ext>
+                </a:extLst>
+              </a:tr>
+              <a:tr h="370840">
+                <a:tc>
+                  <a:txBody>
+                    <a:bodyPr/>
+                    <a:lstStyle/>
+                    <a:p>
+                      <a:r>
+                        <a:rPr lang="en-US" dirty="0"/>
+                        <a:t>0-3 km </a:t>
+                      </a:r>
+                      <a:endParaRPr lang="en-GB" dirty="0"/>
+                    </a:p>
+                  </a:txBody>
+                  <a:tcPr/>
+                </a:tc>
+                <a:tc>
+                  <a:txBody>
+                    <a:bodyPr/>
+                    <a:lstStyle/>
+                    <a:p>
+                      <a:endParaRPr lang="en-GB" dirty="0"/>
+                    </a:p>
+                  </a:txBody>
+                  <a:tcPr/>
+                </a:tc>
+                <a:tc>
+                  <a:txBody>
+                    <a:bodyPr/>
+                    <a:lstStyle/>
+                    <a:p>
+                      <a:endParaRPr lang="en-GB"/>
+                    </a:p>
+                  </a:txBody>
+                  <a:tcPr/>
+                </a:tc>
+                <a:extLst>
+                  <a:ext uri="{0D108BD9-81ED-4DB2-BD59-A6C34878D82A}">
+                    <a16:rowId xmlns:a16="http://schemas.microsoft.com/office/drawing/2014/main" val="788164214"/>
+                  </a:ext>
+                </a:extLst>
+              </a:tr>
+              <a:tr h="370840">
+                <a:tc>
+                  <a:txBody>
+                    <a:bodyPr/>
+                    <a:lstStyle/>
+                    <a:p>
+                      <a:r>
+                        <a:rPr lang="en-US" dirty="0"/>
+                        <a:t>0-4 km </a:t>
+                      </a:r>
+                      <a:endParaRPr lang="en-GB" dirty="0"/>
+                    </a:p>
+                  </a:txBody>
+                  <a:tcPr/>
+                </a:tc>
+                <a:tc>
+                  <a:txBody>
+                    <a:bodyPr/>
+                    <a:lstStyle/>
+                    <a:p>
+                      <a:endParaRPr lang="en-GB"/>
+                    </a:p>
+                  </a:txBody>
+                  <a:tcPr/>
+                </a:tc>
+                <a:tc>
+                  <a:txBody>
+                    <a:bodyPr/>
+                    <a:lstStyle/>
+                    <a:p>
+                      <a:endParaRPr lang="en-GB" dirty="0"/>
+                    </a:p>
+                  </a:txBody>
+                  <a:tcPr/>
+                </a:tc>
+                <a:extLst>
+                  <a:ext uri="{0D108BD9-81ED-4DB2-BD59-A6C34878D82A}">
+                    <a16:rowId xmlns:a16="http://schemas.microsoft.com/office/drawing/2014/main" val="2082923324"/>
+                  </a:ext>
+                </a:extLst>
+              </a:tr>
+              <a:tr h="370840">
+                <a:tc>
+                  <a:txBody>
+                    <a:bodyPr/>
+                    <a:lstStyle/>
+                    <a:p>
+                      <a:r>
+                        <a:rPr lang="en-US" dirty="0"/>
+                        <a:t>5+ km </a:t>
+                      </a:r>
+                      <a:endParaRPr lang="en-GB" dirty="0"/>
+                    </a:p>
+                  </a:txBody>
+                  <a:tcPr/>
+                </a:tc>
+                <a:tc>
+                  <a:txBody>
+                    <a:bodyPr/>
+                    <a:lstStyle/>
+                    <a:p>
+                      <a:endParaRPr lang="en-GB"/>
+                    </a:p>
+                  </a:txBody>
+                  <a:tcPr/>
+                </a:tc>
+                <a:tc>
+                  <a:txBody>
+                    <a:bodyPr/>
+                    <a:lstStyle/>
+                    <a:p>
+                      <a:endParaRPr lang="en-GB" dirty="0"/>
+                    </a:p>
+                  </a:txBody>
+                  <a:tcPr/>
+                </a:tc>
+                <a:extLst>
+                  <a:ext uri="{0D108BD9-81ED-4DB2-BD59-A6C34878D82A}">
+                    <a16:rowId xmlns:a16="http://schemas.microsoft.com/office/drawing/2014/main" val="1771083436"/>
+                  </a:ext>
+                </a:extLst>
+              </a:tr>
+            </a:tbl>
+          </a:graphicData>
+        </a:graphic>
+      </p:graphicFrame>
+    </p:spTree>
+  </p:cSld>
+  <p:clrMapOvr>
+    <a:masterClrMapping/>
+  </p:clrMapOvr>
+</p:sld>
+</file>
+
 <file path=ppt/theme/theme1.xml><?xml version="1.0" encoding="utf-8"?>
 <a:theme xmlns:a="http://schemas.openxmlformats.org/drawingml/2006/main" name="Retrospect">
   <a:themeElements>
